--- a/output/wordlabs-meet-3day.pptx
+++ b/output/wordlabs-meet-3day.pptx
@@ -4240,7 +4240,7 @@
                 <a:ea typeface="Calibri" pitchFamily="34" charset="-122"/>
                 <a:cs typeface="Calibri" pitchFamily="34" charset="-120"/>
               </a:rPr>
-              <a:t>"to come together, join"</a:t>
+              <a:t>"come together, encounter"</a:t>
             </a:r>
             <a:endParaRPr lang="en-US" sz="2200" dirty="0"/>
           </a:p>
@@ -5288,7 +5288,7 @@
                 <a:ea typeface="Calibri" pitchFamily="34" charset="-122"/>
                 <a:cs typeface="Calibri" pitchFamily="34" charset="-120"/>
               </a:rPr>
-              <a:t>Word Labs  •  wordlabs.app  •  Root: 'meet' = to come together, join</a:t>
+              <a:t>Word Labs  •  wordlabs.app  •  Root: 'meet' = come together, encounter</a:t>
             </a:r>
             <a:endParaRPr lang="en-US" sz="800" dirty="0"/>
           </a:p>
@@ -5928,7 +5928,7 @@
                 <a:ea typeface="Calibri" pitchFamily="34" charset="-122"/>
                 <a:cs typeface="Calibri" pitchFamily="34" charset="-120"/>
               </a:rPr>
-              <a:t>Word Labs  •  wordlabs.app  •  Root: 'meet' = to come together, join</a:t>
+              <a:t>Word Labs  •  wordlabs.app  •  Root: 'meet' = come together, encounter</a:t>
             </a:r>
             <a:endParaRPr lang="en-US" sz="800" dirty="0"/>
           </a:p>
@@ -6040,7 +6040,7 @@
                 <a:ea typeface="Calibri" pitchFamily="34" charset="-122"/>
                 <a:cs typeface="Calibri" pitchFamily="34" charset="-120"/>
               </a:rPr>
-              <a:t>The school captain called a </a:t>
+              <a:t>Our class </a:t>
             </a:r>
             <a:pPr algn="l" indent="0" marL="0">
               <a:buNone/>
@@ -6071,7 +6071,7 @@
                 <a:ea typeface="Calibri" pitchFamily="34" charset="-122"/>
                 <a:cs typeface="Calibri" pitchFamily="34" charset="-120"/>
               </a:rPr>
-              <a:t>, and she was the first to greet the </a:t>
+              <a:t> was exciting, and everyone enjoyed </a:t>
             </a:r>
             <a:pPr algn="l" indent="0" marL="0">
               <a:buNone/>
@@ -6088,7 +6088,7 @@
                 <a:ea typeface="Calibri" pitchFamily="34" charset="-122"/>
                 <a:cs typeface="Calibri" pitchFamily="34" charset="-120"/>
               </a:rPr>
-              <a:t>meeters</a:t>
+              <a:t>meeting</a:t>
             </a:r>
             <a:pPr algn="l" indent="0" marL="0">
               <a:buNone/>
@@ -6102,7 +6102,7 @@
                 <a:ea typeface="Calibri" pitchFamily="34" charset="-122"/>
                 <a:cs typeface="Calibri" pitchFamily="34" charset="-120"/>
               </a:rPr>
-              <a:t> at the door.</a:t>
+              <a:t> the guest speaker.</a:t>
             </a:r>
             <a:endParaRPr lang="en-US" sz="1800" dirty="0"/>
           </a:p>
@@ -6385,7 +6385,7 @@
                 <a:ea typeface="Trebuchet MS" pitchFamily="34" charset="-122"/>
                 <a:cs typeface="Trebuchet MS" pitchFamily="34" charset="-120"/>
               </a:rPr>
-              <a:t>meeters</a:t>
+              <a:t>meeting</a:t>
             </a:r>
             <a:endParaRPr lang="en-US" sz="1400" dirty="0"/>
           </a:p>
@@ -6716,7 +6716,7 @@
                 <a:ea typeface="Calibri" pitchFamily="34" charset="-122"/>
                 <a:cs typeface="Calibri" pitchFamily="34" charset="-120"/>
               </a:rPr>
-              <a:t>Word Labs  •  wordlabs.app  •  Root: 'meet' = to come together, join</a:t>
+              <a:t>Word Labs  •  wordlabs.app  •  Root: 'meet' = come together, encounter</a:t>
             </a:r>
             <a:endParaRPr lang="en-US" sz="800" dirty="0"/>
           </a:p>
@@ -7543,7 +7543,7 @@
                 <a:ea typeface="Calibri" pitchFamily="34" charset="-122"/>
                 <a:cs typeface="Calibri" pitchFamily="34" charset="-120"/>
               </a:rPr>
-              <a:t>Word Labs  •  wordlabs.app  •  Root: 'meet' = to come together, join</a:t>
+              <a:t>Word Labs  •  wordlabs.app  •  Root: 'meet' = come together, encounter</a:t>
             </a:r>
             <a:endParaRPr lang="en-US" sz="800" dirty="0"/>
           </a:p>
@@ -7860,7 +7860,7 @@
                 <a:ea typeface="Calibri" pitchFamily="34" charset="-122"/>
                 <a:cs typeface="Calibri" pitchFamily="34" charset="-120"/>
               </a:rPr>
-              <a:t>to come together</a:t>
+              <a:t>come together</a:t>
             </a:r>
             <a:endParaRPr lang="en-US" sz="850" dirty="0"/>
           </a:p>
@@ -7972,7 +7972,7 @@
                 <a:ea typeface="Calibri" pitchFamily="34" charset="-122"/>
                 <a:cs typeface="Calibri" pitchFamily="34" charset="-120"/>
               </a:rPr>
-              <a:t>action in progress</a:t>
+              <a:t>action or process</a:t>
             </a:r>
             <a:endParaRPr lang="en-US" sz="850" dirty="0"/>
           </a:p>
@@ -8528,7 +8528,7 @@
                 <a:ea typeface="Calibri" pitchFamily="34" charset="-122"/>
                 <a:cs typeface="Calibri" pitchFamily="34" charset="-120"/>
               </a:rPr>
-              <a:t>Word Labs  •  wordlabs.app  •  Root: 'meet' = to come together, join</a:t>
+              <a:t>Word Labs  •  wordlabs.app  •  Root: 'meet' = come together, encounter</a:t>
             </a:r>
             <a:endParaRPr lang="en-US" sz="800" dirty="0"/>
           </a:p>
@@ -8845,7 +8845,7 @@
                 <a:ea typeface="Calibri" pitchFamily="34" charset="-122"/>
                 <a:cs typeface="Calibri" pitchFamily="34" charset="-120"/>
               </a:rPr>
-              <a:t>to come together</a:t>
+              <a:t>come together</a:t>
             </a:r>
             <a:endParaRPr lang="en-US" sz="850" dirty="0"/>
           </a:p>
@@ -8957,7 +8957,7 @@
                 <a:ea typeface="Calibri" pitchFamily="34" charset="-122"/>
                 <a:cs typeface="Calibri" pitchFamily="34" charset="-120"/>
               </a:rPr>
-              <a:t>action in progress</a:t>
+              <a:t>action or process</a:t>
             </a:r>
             <a:endParaRPr lang="en-US" sz="850" dirty="0"/>
           </a:p>
@@ -9645,7 +9645,7 @@
                 <a:ea typeface="Calibri" pitchFamily="34" charset="-122"/>
                 <a:cs typeface="Calibri" pitchFamily="34" charset="-120"/>
               </a:rPr>
-              <a:t>Word Labs  •  wordlabs.app  •  Root: 'meet' = to come together, join</a:t>
+              <a:t>Word Labs  •  wordlabs.app  •  Root: 'meet' = come together, encounter</a:t>
             </a:r>
             <a:endParaRPr lang="en-US" sz="800" dirty="0"/>
           </a:p>
@@ -9962,7 +9962,7 @@
                 <a:ea typeface="Calibri" pitchFamily="34" charset="-122"/>
                 <a:cs typeface="Calibri" pitchFamily="34" charset="-120"/>
               </a:rPr>
-              <a:t>to come together</a:t>
+              <a:t>come together</a:t>
             </a:r>
             <a:endParaRPr lang="en-US" sz="850" dirty="0"/>
           </a:p>
@@ -10074,7 +10074,7 @@
                 <a:ea typeface="Calibri" pitchFamily="34" charset="-122"/>
                 <a:cs typeface="Calibri" pitchFamily="34" charset="-120"/>
               </a:rPr>
-              <a:t>action in progress</a:t>
+              <a:t>action or process</a:t>
             </a:r>
             <a:endParaRPr lang="en-US" sz="850" dirty="0"/>
           </a:p>
@@ -11053,7 +11053,7 @@
                 <a:ea typeface="Calibri" pitchFamily="34" charset="-122"/>
                 <a:cs typeface="Calibri" pitchFamily="34" charset="-120"/>
               </a:rPr>
-              <a:t>Word Labs  •  wordlabs.app  •  Root: 'meet' = to come together, join</a:t>
+              <a:t>Word Labs  •  wordlabs.app  •  Root: 'meet' = come together, encounter</a:t>
             </a:r>
             <a:endParaRPr lang="en-US" sz="800" dirty="0"/>
           </a:p>
@@ -11192,7 +11192,7 @@
                 <a:ea typeface="Trebuchet MS" pitchFamily="34" charset="-122"/>
                 <a:cs typeface="Trebuchet MS" pitchFamily="34" charset="-120"/>
               </a:rPr>
-              <a:t>meeters</a:t>
+              <a:t>meeting</a:t>
             </a:r>
             <a:endParaRPr lang="en-US" sz="2800" dirty="0"/>
           </a:p>
@@ -11880,7 +11880,7 @@
                 <a:ea typeface="Calibri" pitchFamily="34" charset="-122"/>
                 <a:cs typeface="Calibri" pitchFamily="34" charset="-120"/>
               </a:rPr>
-              <a:t>Word Labs  •  wordlabs.app  •  Root: 'meet' = to come together, join</a:t>
+              <a:t>Word Labs  •  wordlabs.app  •  Root: 'meet' = come together, encounter</a:t>
             </a:r>
             <a:endParaRPr lang="en-US" sz="800" dirty="0"/>
           </a:p>
@@ -12019,7 +12019,7 @@
                 <a:ea typeface="Trebuchet MS" pitchFamily="34" charset="-122"/>
                 <a:cs typeface="Trebuchet MS" pitchFamily="34" charset="-120"/>
               </a:rPr>
-              <a:t>meeters</a:t>
+              <a:t>meeting</a:t>
             </a:r>
             <a:endParaRPr lang="en-US" sz="2800" dirty="0"/>
           </a:p>
@@ -12099,7 +12099,7 @@
         </p:nvSpPr>
         <p:spPr>
           <a:xfrm>
-            <a:off x="2221992" y="2258568"/>
+            <a:off x="2938272" y="2258568"/>
             <a:ext cx="1828800" cy="292608"/>
           </a:xfrm>
           <a:prstGeom prst="rect">
@@ -12133,7 +12133,7 @@
         </p:nvSpPr>
         <p:spPr>
           <a:xfrm>
-            <a:off x="2221992" y="2258568"/>
+            <a:off x="2938272" y="2258568"/>
             <a:ext cx="1828800" cy="292608"/>
           </a:xfrm>
           <a:prstGeom prst="rect">
@@ -12172,7 +12172,7 @@
         </p:nvSpPr>
         <p:spPr>
           <a:xfrm>
-            <a:off x="2221992" y="2569464"/>
+            <a:off x="2938272" y="2569464"/>
             <a:ext cx="1828800" cy="201168"/>
           </a:xfrm>
           <a:prstGeom prst="rect">
@@ -12197,7 +12197,7 @@
                 <a:ea typeface="Calibri" pitchFamily="34" charset="-122"/>
                 <a:cs typeface="Calibri" pitchFamily="34" charset="-120"/>
               </a:rPr>
-              <a:t>to come together</a:t>
+              <a:t>come together</a:t>
             </a:r>
             <a:endParaRPr lang="en-US" sz="850" dirty="0"/>
           </a:p>
@@ -12211,7 +12211,7 @@
         </p:nvSpPr>
         <p:spPr>
           <a:xfrm>
-            <a:off x="4370832" y="2258568"/>
+            <a:off x="5803392" y="2258568"/>
             <a:ext cx="1828800" cy="292608"/>
           </a:xfrm>
           <a:prstGeom prst="rect">
@@ -12245,7 +12245,7 @@
         </p:nvSpPr>
         <p:spPr>
           <a:xfrm>
-            <a:off x="4370832" y="2258568"/>
+            <a:off x="5803392" y="2258568"/>
             <a:ext cx="1828800" cy="292608"/>
           </a:xfrm>
           <a:prstGeom prst="rect">
@@ -12270,7 +12270,7 @@
                 <a:ea typeface="Trebuchet MS" pitchFamily="34" charset="-122"/>
                 <a:cs typeface="Trebuchet MS" pitchFamily="34" charset="-120"/>
               </a:rPr>
-              <a:t>er</a:t>
+              <a:t>ing</a:t>
             </a:r>
             <a:endParaRPr lang="en-US" sz="1300" dirty="0"/>
           </a:p>
@@ -12284,7 +12284,7 @@
         </p:nvSpPr>
         <p:spPr>
           <a:xfrm>
-            <a:off x="4370832" y="2569464"/>
+            <a:off x="5803392" y="2569464"/>
             <a:ext cx="1828800" cy="201168"/>
           </a:xfrm>
           <a:prstGeom prst="rect">
@@ -12309,7 +12309,7 @@
                 <a:ea typeface="Calibri" pitchFamily="34" charset="-122"/>
                 <a:cs typeface="Calibri" pitchFamily="34" charset="-120"/>
               </a:rPr>
-              <a:t>one who does</a:t>
+              <a:t>action or process</a:t>
             </a:r>
             <a:endParaRPr lang="en-US" sz="850" dirty="0"/>
           </a:p>
@@ -12323,30 +12323,23 @@
         </p:nvSpPr>
         <p:spPr>
           <a:xfrm>
-            <a:off x="6519672" y="2258568"/>
-            <a:ext cx="1828800" cy="292608"/>
+            <a:off x="365760" y="3273552"/>
+            <a:ext cx="1371600" cy="658368"/>
           </a:xfrm>
           <a:prstGeom prst="rect">
             <a:avLst>
-              <a:gd name="adj" fmla="val 25000"/>
+              <a:gd name="adj" fmla="val 8333"/>
             </a:avLst>
           </a:prstGeom>
           <a:solidFill>
-            <a:srgbClr val="FCE7F3"/>
-          </a:solidFill>
-          <a:ln w="19050">
-            <a:solidFill>
-              <a:srgbClr val="DB2777"/>
-            </a:solidFill>
-            <a:prstDash val="solid"/>
-          </a:ln>
-          <a:effectLst>
-            <a:outerShdw sx="100000" sy="100000" kx="0" ky="0" algn="bl" rotWithShape="0" blurRad="101600" dist="38100" dir="8100000">
-              <a:srgbClr val="000000">
-                <a:alpha val="12000"/>
-              </a:srgbClr>
-            </a:outerShdw>
-          </a:effectLst>
+            <a:srgbClr val="E2E8F0"/>
+          </a:solidFill>
+          <a:ln w="12700">
+            <a:solidFill>
+              <a:srgbClr val="E2E8F0"/>
+            </a:solidFill>
+            <a:prstDash val="solid"/>
+          </a:ln>
         </p:spPr>
       </p:sp>
       <p:sp>
@@ -12357,8 +12350,8 @@
         </p:nvSpPr>
         <p:spPr>
           <a:xfrm>
-            <a:off x="6519672" y="2258568"/>
-            <a:ext cx="1828800" cy="292608"/>
+            <a:off x="365760" y="3273552"/>
+            <a:ext cx="1371600" cy="658368"/>
           </a:xfrm>
           <a:prstGeom prst="rect">
             <a:avLst/>
@@ -12374,73 +12367,100 @@
               <a:buNone/>
             </a:pPr>
             <a:r>
-              <a:rPr lang="en-US" sz="1300" b="1" dirty="0">
-                <a:solidFill>
-                  <a:srgbClr val="9D174D"/>
+              <a:rPr lang="en-US" sz="1100" b="1" dirty="0">
+                <a:solidFill>
+                  <a:srgbClr val="475569"/>
                 </a:solidFill>
                 <a:latin typeface="Trebuchet MS" pitchFamily="34" charset="0"/>
                 <a:ea typeface="Trebuchet MS" pitchFamily="34" charset="-122"/>
                 <a:cs typeface="Trebuchet MS" pitchFamily="34" charset="-120"/>
               </a:rPr>
-              <a:t>s</a:t>
-            </a:r>
-            <a:endParaRPr lang="en-US" sz="1300" dirty="0"/>
-          </a:p>
-        </p:txBody>
-      </p:sp>
-      <p:sp>
-        <p:nvSpPr>
-          <p:cNvPr id="24" name="Text 22"/>
-          <p:cNvSpPr/>
-          <p:nvPr/>
-        </p:nvSpPr>
-        <p:spPr>
-          <a:xfrm>
-            <a:off x="6519672" y="2569464"/>
-            <a:ext cx="1828800" cy="201168"/>
-          </a:xfrm>
-          <a:prstGeom prst="rect">
-            <a:avLst/>
-          </a:prstGeom>
-          <a:noFill/>
-          <a:ln/>
-        </p:spPr>
-        <p:txBody>
-          <a:bodyPr wrap="square" lIns="0" tIns="0" rIns="0" bIns="0" rtlCol="0" anchor="t"/>
-          <a:lstStyle/>
-          <a:p>
-            <a:pPr algn="ctr" indent="0" marL="0">
-              <a:buNone/>
-            </a:pPr>
-            <a:r>
-              <a:rPr lang="en-US" sz="850" dirty="0">
-                <a:solidFill>
-                  <a:srgbClr val="475569"/>
+              <a:t>Syllables</a:t>
+            </a:r>
+            <a:endParaRPr lang="en-US" sz="1100" dirty="0"/>
+          </a:p>
+        </p:txBody>
+      </p:sp>
+      <p:sp>
+        <p:nvSpPr>
+          <p:cNvPr id="24" name="Shape 22"/>
+          <p:cNvSpPr/>
+          <p:nvPr/>
+        </p:nvSpPr>
+        <p:spPr>
+          <a:xfrm>
+            <a:off x="1874520" y="3273552"/>
+            <a:ext cx="6903720" cy="658368"/>
+          </a:xfrm>
+          <a:prstGeom prst="rect">
+            <a:avLst>
+              <a:gd name="adj" fmla="val 8333"/>
+            </a:avLst>
+          </a:prstGeom>
+          <a:solidFill>
+            <a:srgbClr val="F8FAFC"/>
+          </a:solidFill>
+          <a:ln w="12700">
+            <a:solidFill>
+              <a:srgbClr val="E2E8F0"/>
+            </a:solidFill>
+            <a:prstDash val="dash"/>
+          </a:ln>
+        </p:spPr>
+      </p:sp>
+      <p:sp>
+        <p:nvSpPr>
+          <p:cNvPr id="25" name="Text 23"/>
+          <p:cNvSpPr/>
+          <p:nvPr/>
+        </p:nvSpPr>
+        <p:spPr>
+          <a:xfrm>
+            <a:off x="1874520" y="3273552"/>
+            <a:ext cx="6903720" cy="658368"/>
+          </a:xfrm>
+          <a:prstGeom prst="rect">
+            <a:avLst/>
+          </a:prstGeom>
+          <a:noFill/>
+          <a:ln/>
+        </p:spPr>
+        <p:txBody>
+          <a:bodyPr wrap="square" rtlCol="0" anchor="ctr"/>
+          <a:lstStyle/>
+          <a:p>
+            <a:pPr algn="ctr" indent="0" marL="0">
+              <a:buNone/>
+            </a:pPr>
+            <a:r>
+              <a:rPr lang="en-US" sz="1100" i="1" dirty="0">
+                <a:solidFill>
+                  <a:srgbClr val="CBD5E1"/>
                 </a:solidFill>
                 <a:latin typeface="Calibri" pitchFamily="34" charset="0"/>
                 <a:ea typeface="Calibri" pitchFamily="34" charset="-122"/>
                 <a:cs typeface="Calibri" pitchFamily="34" charset="-120"/>
               </a:rPr>
-              <a:t>more than one</a:t>
-            </a:r>
-            <a:endParaRPr lang="en-US" sz="850" dirty="0"/>
-          </a:p>
-        </p:txBody>
-      </p:sp>
-      <p:sp>
-        <p:nvSpPr>
-          <p:cNvPr id="25" name="Shape 23"/>
-          <p:cNvSpPr/>
-          <p:nvPr/>
-        </p:nvSpPr>
-        <p:spPr>
-          <a:xfrm>
-            <a:off x="365760" y="3273552"/>
-            <a:ext cx="1371600" cy="658368"/>
+              <a:t>Write here...</a:t>
+            </a:r>
+            <a:endParaRPr lang="en-US" sz="1100" dirty="0"/>
+          </a:p>
+        </p:txBody>
+      </p:sp>
+      <p:sp>
+        <p:nvSpPr>
+          <p:cNvPr id="26" name="Shape 24"/>
+          <p:cNvSpPr/>
+          <p:nvPr/>
+        </p:nvSpPr>
+        <p:spPr>
+          <a:xfrm>
+            <a:off x="365760" y="4096512"/>
+            <a:ext cx="1371600" cy="804672"/>
           </a:xfrm>
           <a:prstGeom prst="rect">
             <a:avLst>
-              <a:gd name="adj" fmla="val 8333"/>
+              <a:gd name="adj" fmla="val 6818"/>
             </a:avLst>
           </a:prstGeom>
           <a:solidFill>
@@ -12456,14 +12476,14 @@
       </p:sp>
       <p:sp>
         <p:nvSpPr>
-          <p:cNvPr id="26" name="Text 24"/>
-          <p:cNvSpPr/>
-          <p:nvPr/>
-        </p:nvSpPr>
-        <p:spPr>
-          <a:xfrm>
-            <a:off x="365760" y="3273552"/>
-            <a:ext cx="1371600" cy="658368"/>
+          <p:cNvPr id="27" name="Text 25"/>
+          <p:cNvSpPr/>
+          <p:nvPr/>
+        </p:nvSpPr>
+        <p:spPr>
+          <a:xfrm>
+            <a:off x="365760" y="4096512"/>
+            <a:ext cx="1371600" cy="804672"/>
           </a:xfrm>
           <a:prstGeom prst="rect">
             <a:avLst/>
@@ -12487,7 +12507,7 @@
                 <a:ea typeface="Trebuchet MS" pitchFamily="34" charset="-122"/>
                 <a:cs typeface="Trebuchet MS" pitchFamily="34" charset="-120"/>
               </a:rPr>
-              <a:t>Syllables</a:t>
+              <a:t>Phonemes</a:t>
             </a:r>
             <a:endParaRPr lang="en-US" sz="1100" dirty="0"/>
           </a:p>
@@ -12495,80 +12515,14 @@
       </p:sp>
       <p:sp>
         <p:nvSpPr>
-          <p:cNvPr id="27" name="Shape 25"/>
-          <p:cNvSpPr/>
-          <p:nvPr/>
-        </p:nvSpPr>
-        <p:spPr>
-          <a:xfrm>
-            <a:off x="1874520" y="3273552"/>
-            <a:ext cx="6903720" cy="658368"/>
-          </a:xfrm>
-          <a:prstGeom prst="rect">
-            <a:avLst>
-              <a:gd name="adj" fmla="val 8333"/>
-            </a:avLst>
-          </a:prstGeom>
-          <a:solidFill>
-            <a:srgbClr val="F8FAFC"/>
-          </a:solidFill>
-          <a:ln w="12700">
-            <a:solidFill>
-              <a:srgbClr val="E2E8F0"/>
-            </a:solidFill>
-            <a:prstDash val="dash"/>
-          </a:ln>
-        </p:spPr>
-      </p:sp>
-      <p:sp>
-        <p:nvSpPr>
-          <p:cNvPr id="28" name="Text 26"/>
-          <p:cNvSpPr/>
-          <p:nvPr/>
-        </p:nvSpPr>
-        <p:spPr>
-          <a:xfrm>
-            <a:off x="1874520" y="3273552"/>
-            <a:ext cx="6903720" cy="658368"/>
-          </a:xfrm>
-          <a:prstGeom prst="rect">
-            <a:avLst/>
-          </a:prstGeom>
-          <a:noFill/>
-          <a:ln/>
-        </p:spPr>
-        <p:txBody>
-          <a:bodyPr wrap="square" rtlCol="0" anchor="ctr"/>
-          <a:lstStyle/>
-          <a:p>
-            <a:pPr algn="ctr" indent="0" marL="0">
-              <a:buNone/>
-            </a:pPr>
-            <a:r>
-              <a:rPr lang="en-US" sz="1100" i="1" dirty="0">
-                <a:solidFill>
-                  <a:srgbClr val="CBD5E1"/>
-                </a:solidFill>
-                <a:latin typeface="Calibri" pitchFamily="34" charset="0"/>
-                <a:ea typeface="Calibri" pitchFamily="34" charset="-122"/>
-                <a:cs typeface="Calibri" pitchFamily="34" charset="-120"/>
-              </a:rPr>
-              <a:t>Write here...</a:t>
-            </a:r>
-            <a:endParaRPr lang="en-US" sz="1100" dirty="0"/>
-          </a:p>
-        </p:txBody>
-      </p:sp>
-      <p:sp>
-        <p:nvSpPr>
-          <p:cNvPr id="29" name="Shape 27"/>
-          <p:cNvSpPr/>
-          <p:nvPr/>
-        </p:nvSpPr>
-        <p:spPr>
-          <a:xfrm>
-            <a:off x="365760" y="4096512"/>
-            <a:ext cx="1371600" cy="804672"/>
+          <p:cNvPr id="28" name="Shape 26"/>
+          <p:cNvSpPr/>
+          <p:nvPr/>
+        </p:nvSpPr>
+        <p:spPr>
+          <a:xfrm>
+            <a:off x="1874520" y="4096512"/>
+            <a:ext cx="6903720" cy="804672"/>
           </a:xfrm>
           <a:prstGeom prst="rect">
             <a:avLst>
@@ -12576,85 +12530,19 @@
             </a:avLst>
           </a:prstGeom>
           <a:solidFill>
-            <a:srgbClr val="E2E8F0"/>
+            <a:srgbClr val="F8FAFC"/>
           </a:solidFill>
           <a:ln w="12700">
             <a:solidFill>
               <a:srgbClr val="E2E8F0"/>
             </a:solidFill>
-            <a:prstDash val="solid"/>
-          </a:ln>
-        </p:spPr>
-      </p:sp>
-      <p:sp>
-        <p:nvSpPr>
-          <p:cNvPr id="30" name="Text 28"/>
-          <p:cNvSpPr/>
-          <p:nvPr/>
-        </p:nvSpPr>
-        <p:spPr>
-          <a:xfrm>
-            <a:off x="365760" y="4096512"/>
-            <a:ext cx="1371600" cy="804672"/>
-          </a:xfrm>
-          <a:prstGeom prst="rect">
-            <a:avLst/>
-          </a:prstGeom>
-          <a:noFill/>
-          <a:ln/>
-        </p:spPr>
-        <p:txBody>
-          <a:bodyPr wrap="square" lIns="0" tIns="0" rIns="0" bIns="0" rtlCol="0" anchor="ctr"/>
-          <a:lstStyle/>
-          <a:p>
-            <a:pPr algn="ctr" indent="0" marL="0">
-              <a:buNone/>
-            </a:pPr>
-            <a:r>
-              <a:rPr lang="en-US" sz="1100" b="1" dirty="0">
-                <a:solidFill>
-                  <a:srgbClr val="475569"/>
-                </a:solidFill>
-                <a:latin typeface="Trebuchet MS" pitchFamily="34" charset="0"/>
-                <a:ea typeface="Trebuchet MS" pitchFamily="34" charset="-122"/>
-                <a:cs typeface="Trebuchet MS" pitchFamily="34" charset="-120"/>
-              </a:rPr>
-              <a:t>Phonemes</a:t>
-            </a:r>
-            <a:endParaRPr lang="en-US" sz="1100" dirty="0"/>
-          </a:p>
-        </p:txBody>
-      </p:sp>
-      <p:sp>
-        <p:nvSpPr>
-          <p:cNvPr id="31" name="Shape 29"/>
-          <p:cNvSpPr/>
-          <p:nvPr/>
-        </p:nvSpPr>
-        <p:spPr>
-          <a:xfrm>
-            <a:off x="1874520" y="4096512"/>
-            <a:ext cx="6903720" cy="804672"/>
-          </a:xfrm>
-          <a:prstGeom prst="rect">
-            <a:avLst>
-              <a:gd name="adj" fmla="val 6818"/>
-            </a:avLst>
-          </a:prstGeom>
-          <a:solidFill>
-            <a:srgbClr val="F8FAFC"/>
-          </a:solidFill>
-          <a:ln w="12700">
-            <a:solidFill>
-              <a:srgbClr val="E2E8F0"/>
-            </a:solidFill>
             <a:prstDash val="dash"/>
           </a:ln>
         </p:spPr>
       </p:sp>
       <p:sp>
         <p:nvSpPr>
-          <p:cNvPr id="32" name="Text 30"/>
+          <p:cNvPr id="29" name="Text 27"/>
           <p:cNvSpPr/>
           <p:nvPr/>
         </p:nvSpPr>
@@ -12977,7 +12865,7 @@
                 <a:ea typeface="Calibri" pitchFamily="34" charset="-122"/>
                 <a:cs typeface="Calibri" pitchFamily="34" charset="-120"/>
               </a:rPr>
-              <a:t>Word Labs  •  wordlabs.app  •  Root: 'meet' = to come together, join</a:t>
+              <a:t>Word Labs  •  wordlabs.app  •  Root: 'meet' = come together, encounter</a:t>
             </a:r>
             <a:endParaRPr lang="en-US" sz="800" dirty="0"/>
           </a:p>
@@ -13116,7 +13004,7 @@
                 <a:ea typeface="Trebuchet MS" pitchFamily="34" charset="-122"/>
                 <a:cs typeface="Trebuchet MS" pitchFamily="34" charset="-120"/>
               </a:rPr>
-              <a:t>meeters</a:t>
+              <a:t>meeting</a:t>
             </a:r>
             <a:endParaRPr lang="en-US" sz="2800" dirty="0"/>
           </a:p>
@@ -13196,7 +13084,7 @@
         </p:nvSpPr>
         <p:spPr>
           <a:xfrm>
-            <a:off x="2221992" y="2258568"/>
+            <a:off x="2938272" y="2258568"/>
             <a:ext cx="1828800" cy="292608"/>
           </a:xfrm>
           <a:prstGeom prst="rect">
@@ -13230,7 +13118,7 @@
         </p:nvSpPr>
         <p:spPr>
           <a:xfrm>
-            <a:off x="2221992" y="2258568"/>
+            <a:off x="2938272" y="2258568"/>
             <a:ext cx="1828800" cy="292608"/>
           </a:xfrm>
           <a:prstGeom prst="rect">
@@ -13269,7 +13157,7 @@
         </p:nvSpPr>
         <p:spPr>
           <a:xfrm>
-            <a:off x="2221992" y="2569464"/>
+            <a:off x="2938272" y="2569464"/>
             <a:ext cx="1828800" cy="201168"/>
           </a:xfrm>
           <a:prstGeom prst="rect">
@@ -13294,7 +13182,7 @@
                 <a:ea typeface="Calibri" pitchFamily="34" charset="-122"/>
                 <a:cs typeface="Calibri" pitchFamily="34" charset="-120"/>
               </a:rPr>
-              <a:t>to come together</a:t>
+              <a:t>come together</a:t>
             </a:r>
             <a:endParaRPr lang="en-US" sz="850" dirty="0"/>
           </a:p>
@@ -13308,7 +13196,7 @@
         </p:nvSpPr>
         <p:spPr>
           <a:xfrm>
-            <a:off x="4370832" y="2258568"/>
+            <a:off x="5803392" y="2258568"/>
             <a:ext cx="1828800" cy="292608"/>
           </a:xfrm>
           <a:prstGeom prst="rect">
@@ -13342,7 +13230,7 @@
         </p:nvSpPr>
         <p:spPr>
           <a:xfrm>
-            <a:off x="4370832" y="2258568"/>
+            <a:off x="5803392" y="2258568"/>
             <a:ext cx="1828800" cy="292608"/>
           </a:xfrm>
           <a:prstGeom prst="rect">
@@ -13367,7 +13255,7 @@
                 <a:ea typeface="Trebuchet MS" pitchFamily="34" charset="-122"/>
                 <a:cs typeface="Trebuchet MS" pitchFamily="34" charset="-120"/>
               </a:rPr>
-              <a:t>er</a:t>
+              <a:t>ing</a:t>
             </a:r>
             <a:endParaRPr lang="en-US" sz="1300" dirty="0"/>
           </a:p>
@@ -13381,7 +13269,7 @@
         </p:nvSpPr>
         <p:spPr>
           <a:xfrm>
-            <a:off x="4370832" y="2569464"/>
+            <a:off x="5803392" y="2569464"/>
             <a:ext cx="1828800" cy="201168"/>
           </a:xfrm>
           <a:prstGeom prst="rect">
@@ -13406,7 +13294,7 @@
                 <a:ea typeface="Calibri" pitchFamily="34" charset="-122"/>
                 <a:cs typeface="Calibri" pitchFamily="34" charset="-120"/>
               </a:rPr>
-              <a:t>one who does</a:t>
+              <a:t>action or process</a:t>
             </a:r>
             <a:endParaRPr lang="en-US" sz="850" dirty="0"/>
           </a:p>
@@ -13420,30 +13308,23 @@
         </p:nvSpPr>
         <p:spPr>
           <a:xfrm>
-            <a:off x="6519672" y="2258568"/>
-            <a:ext cx="1828800" cy="292608"/>
+            <a:off x="365760" y="3273552"/>
+            <a:ext cx="1371600" cy="658368"/>
           </a:xfrm>
           <a:prstGeom prst="rect">
             <a:avLst>
-              <a:gd name="adj" fmla="val 25000"/>
+              <a:gd name="adj" fmla="val 8333"/>
             </a:avLst>
           </a:prstGeom>
           <a:solidFill>
-            <a:srgbClr val="FCE7F3"/>
-          </a:solidFill>
-          <a:ln w="19050">
-            <a:solidFill>
-              <a:srgbClr val="DB2777"/>
-            </a:solidFill>
-            <a:prstDash val="solid"/>
-          </a:ln>
-          <a:effectLst>
-            <a:outerShdw sx="100000" sy="100000" kx="0" ky="0" algn="bl" rotWithShape="0" blurRad="101600" dist="38100" dir="8100000">
-              <a:srgbClr val="000000">
-                <a:alpha val="12000"/>
-              </a:srgbClr>
-            </a:outerShdw>
-          </a:effectLst>
+            <a:srgbClr val="E2E8F0"/>
+          </a:solidFill>
+          <a:ln w="12700">
+            <a:solidFill>
+              <a:srgbClr val="E2E8F0"/>
+            </a:solidFill>
+            <a:prstDash val="solid"/>
+          </a:ln>
         </p:spPr>
       </p:sp>
       <p:sp>
@@ -13454,8 +13335,8 @@
         </p:nvSpPr>
         <p:spPr>
           <a:xfrm>
-            <a:off x="6519672" y="2258568"/>
-            <a:ext cx="1828800" cy="292608"/>
+            <a:off x="365760" y="3273552"/>
+            <a:ext cx="1371600" cy="658368"/>
           </a:xfrm>
           <a:prstGeom prst="rect">
             <a:avLst/>
@@ -13471,69 +13352,30 @@
               <a:buNone/>
             </a:pPr>
             <a:r>
-              <a:rPr lang="en-US" sz="1300" b="1" dirty="0">
-                <a:solidFill>
-                  <a:srgbClr val="9D174D"/>
+              <a:rPr lang="en-US" sz="1100" b="1" dirty="0">
+                <a:solidFill>
+                  <a:srgbClr val="475569"/>
                 </a:solidFill>
                 <a:latin typeface="Trebuchet MS" pitchFamily="34" charset="0"/>
                 <a:ea typeface="Trebuchet MS" pitchFamily="34" charset="-122"/>
                 <a:cs typeface="Trebuchet MS" pitchFamily="34" charset="-120"/>
               </a:rPr>
-              <a:t>s</a:t>
-            </a:r>
-            <a:endParaRPr lang="en-US" sz="1300" dirty="0"/>
-          </a:p>
-        </p:txBody>
-      </p:sp>
-      <p:sp>
-        <p:nvSpPr>
-          <p:cNvPr id="24" name="Text 22"/>
-          <p:cNvSpPr/>
-          <p:nvPr/>
-        </p:nvSpPr>
-        <p:spPr>
-          <a:xfrm>
-            <a:off x="6519672" y="2569464"/>
-            <a:ext cx="1828800" cy="201168"/>
-          </a:xfrm>
-          <a:prstGeom prst="rect">
-            <a:avLst/>
-          </a:prstGeom>
-          <a:noFill/>
-          <a:ln/>
-        </p:spPr>
-        <p:txBody>
-          <a:bodyPr wrap="square" lIns="0" tIns="0" rIns="0" bIns="0" rtlCol="0" anchor="t"/>
-          <a:lstStyle/>
-          <a:p>
-            <a:pPr algn="ctr" indent="0" marL="0">
-              <a:buNone/>
-            </a:pPr>
-            <a:r>
-              <a:rPr lang="en-US" sz="850" dirty="0">
-                <a:solidFill>
-                  <a:srgbClr val="475569"/>
-                </a:solidFill>
-                <a:latin typeface="Calibri" pitchFamily="34" charset="0"/>
-                <a:ea typeface="Calibri" pitchFamily="34" charset="-122"/>
-                <a:cs typeface="Calibri" pitchFamily="34" charset="-120"/>
-              </a:rPr>
-              <a:t>more than one</a:t>
-            </a:r>
-            <a:endParaRPr lang="en-US" sz="850" dirty="0"/>
-          </a:p>
-        </p:txBody>
-      </p:sp>
-      <p:sp>
-        <p:nvSpPr>
-          <p:cNvPr id="25" name="Shape 23"/>
-          <p:cNvSpPr/>
-          <p:nvPr/>
-        </p:nvSpPr>
-        <p:spPr>
-          <a:xfrm>
-            <a:off x="365760" y="3273552"/>
-            <a:ext cx="1371600" cy="658368"/>
+              <a:t>Syllables</a:t>
+            </a:r>
+            <a:endParaRPr lang="en-US" sz="1100" dirty="0"/>
+          </a:p>
+        </p:txBody>
+      </p:sp>
+      <p:sp>
+        <p:nvSpPr>
+          <p:cNvPr id="24" name="Shape 22"/>
+          <p:cNvSpPr/>
+          <p:nvPr/>
+        </p:nvSpPr>
+        <p:spPr>
+          <a:xfrm>
+            <a:off x="1874520" y="3273552"/>
+            <a:ext cx="6903720" cy="658368"/>
           </a:xfrm>
           <a:prstGeom prst="rect">
             <a:avLst>
@@ -13541,11 +13383,38 @@
             </a:avLst>
           </a:prstGeom>
           <a:solidFill>
-            <a:srgbClr val="E2E8F0"/>
-          </a:solidFill>
-          <a:ln w="12700">
-            <a:solidFill>
-              <a:srgbClr val="E2E8F0"/>
+            <a:srgbClr val="CCFBF1"/>
+          </a:solidFill>
+          <a:ln w="12700">
+            <a:solidFill>
+              <a:srgbClr val="0D9488"/>
+            </a:solidFill>
+            <a:prstDash val="solid"/>
+          </a:ln>
+        </p:spPr>
+      </p:sp>
+      <p:sp>
+        <p:nvSpPr>
+          <p:cNvPr id="25" name="Shape 23"/>
+          <p:cNvSpPr/>
+          <p:nvPr/>
+        </p:nvSpPr>
+        <p:spPr>
+          <a:xfrm>
+            <a:off x="2999232" y="3364992"/>
+            <a:ext cx="1645920" cy="475488"/>
+          </a:xfrm>
+          <a:prstGeom prst="rect">
+            <a:avLst>
+              <a:gd name="adj" fmla="val 9615"/>
+            </a:avLst>
+          </a:prstGeom>
+          <a:solidFill>
+            <a:srgbClr val="FFFFFF"/>
+          </a:solidFill>
+          <a:ln w="12700">
+            <a:solidFill>
+              <a:srgbClr val="0D9488"/>
             </a:solidFill>
             <a:prstDash val="solid"/>
           </a:ln>
@@ -13559,8 +13428,8 @@
         </p:nvSpPr>
         <p:spPr>
           <a:xfrm>
-            <a:off x="365760" y="3273552"/>
-            <a:ext cx="1371600" cy="658368"/>
+            <a:off x="2999232" y="3364992"/>
+            <a:ext cx="1645920" cy="475488"/>
           </a:xfrm>
           <a:prstGeom prst="rect">
             <a:avLst/>
@@ -13576,46 +13445,58 @@
               <a:buNone/>
             </a:pPr>
             <a:r>
-              <a:rPr lang="en-US" sz="1100" b="1" dirty="0">
-                <a:solidFill>
-                  <a:srgbClr val="475569"/>
+              <a:rPr lang="en-US" sz="1400" b="1" dirty="0">
+                <a:solidFill>
+                  <a:srgbClr val="0D9488"/>
                 </a:solidFill>
                 <a:latin typeface="Trebuchet MS" pitchFamily="34" charset="0"/>
                 <a:ea typeface="Trebuchet MS" pitchFamily="34" charset="-122"/>
                 <a:cs typeface="Trebuchet MS" pitchFamily="34" charset="-120"/>
               </a:rPr>
-              <a:t>Syllables</a:t>
-            </a:r>
-            <a:endParaRPr lang="en-US" sz="1100" dirty="0"/>
-          </a:p>
-        </p:txBody>
-      </p:sp>
-      <p:sp>
-        <p:nvSpPr>
-          <p:cNvPr id="27" name="Shape 25"/>
-          <p:cNvSpPr/>
-          <p:nvPr/>
-        </p:nvSpPr>
-        <p:spPr>
-          <a:xfrm>
-            <a:off x="1874520" y="3273552"/>
-            <a:ext cx="6903720" cy="658368"/>
-          </a:xfrm>
-          <a:prstGeom prst="rect">
-            <a:avLst>
-              <a:gd name="adj" fmla="val 8333"/>
-            </a:avLst>
-          </a:prstGeom>
-          <a:solidFill>
-            <a:srgbClr val="CCFBF1"/>
-          </a:solidFill>
-          <a:ln w="12700">
-            <a:solidFill>
-              <a:srgbClr val="0D9488"/>
-            </a:solidFill>
-            <a:prstDash val="solid"/>
-          </a:ln>
-        </p:spPr>
+              <a:t>meet</a:t>
+            </a:r>
+            <a:endParaRPr lang="en-US" sz="1400" dirty="0"/>
+          </a:p>
+        </p:txBody>
+      </p:sp>
+      <p:sp>
+        <p:nvSpPr>
+          <p:cNvPr id="27" name="Text 25"/>
+          <p:cNvSpPr/>
+          <p:nvPr/>
+        </p:nvSpPr>
+        <p:spPr>
+          <a:xfrm>
+            <a:off x="4645152" y="3364992"/>
+            <a:ext cx="1097280" cy="475488"/>
+          </a:xfrm>
+          <a:prstGeom prst="rect">
+            <a:avLst/>
+          </a:prstGeom>
+          <a:noFill/>
+          <a:ln/>
+        </p:spPr>
+        <p:txBody>
+          <a:bodyPr wrap="square" lIns="0" tIns="0" rIns="0" bIns="0" rtlCol="0" anchor="ctr"/>
+          <a:lstStyle/>
+          <a:p>
+            <a:pPr algn="ctr" indent="0" marL="0">
+              <a:buNone/>
+            </a:pPr>
+            <a:r>
+              <a:rPr lang="en-US" sz="1600" b="1" dirty="0">
+                <a:solidFill>
+                  <a:srgbClr val="0D9488"/>
+                </a:solidFill>
+                <a:latin typeface="Trebuchet MS" pitchFamily="34" charset="0"/>
+                <a:ea typeface="Trebuchet MS" pitchFamily="34" charset="-122"/>
+                <a:cs typeface="Trebuchet MS" pitchFamily="34" charset="-120"/>
+              </a:rPr>
+              <a:t>·</a:t>
+            </a:r>
+            <a:endParaRPr lang="en-US" sz="1600" dirty="0"/>
+          </a:p>
+        </p:txBody>
       </p:sp>
       <p:sp>
         <p:nvSpPr>
@@ -13625,7 +13506,7 @@
         </p:nvSpPr>
         <p:spPr>
           <a:xfrm>
-            <a:off x="2999232" y="3364992"/>
+            <a:off x="5742432" y="3364992"/>
             <a:ext cx="1645920" cy="475488"/>
           </a:xfrm>
           <a:prstGeom prst="rect">
@@ -13652,7 +13533,7 @@
         </p:nvSpPr>
         <p:spPr>
           <a:xfrm>
-            <a:off x="2999232" y="3364992"/>
+            <a:off x="5742432" y="3364992"/>
             <a:ext cx="1645920" cy="475488"/>
           </a:xfrm>
           <a:prstGeom prst="rect">
@@ -13677,7 +13558,7 @@
                 <a:ea typeface="Trebuchet MS" pitchFamily="34" charset="-122"/>
                 <a:cs typeface="Trebuchet MS" pitchFamily="34" charset="-120"/>
               </a:rPr>
-              <a:t>meet</a:t>
+              <a:t>ing</a:t>
             </a:r>
             <a:endParaRPr lang="en-US" sz="1400" dirty="0"/>
           </a:p>
@@ -13685,14 +13566,41 @@
       </p:sp>
       <p:sp>
         <p:nvSpPr>
-          <p:cNvPr id="30" name="Text 28"/>
-          <p:cNvSpPr/>
-          <p:nvPr/>
-        </p:nvSpPr>
-        <p:spPr>
-          <a:xfrm>
-            <a:off x="4645152" y="3364992"/>
-            <a:ext cx="1097280" cy="475488"/>
+          <p:cNvPr id="30" name="Shape 28"/>
+          <p:cNvSpPr/>
+          <p:nvPr/>
+        </p:nvSpPr>
+        <p:spPr>
+          <a:xfrm>
+            <a:off x="365760" y="4096512"/>
+            <a:ext cx="1371600" cy="804672"/>
+          </a:xfrm>
+          <a:prstGeom prst="rect">
+            <a:avLst>
+              <a:gd name="adj" fmla="val 6818"/>
+            </a:avLst>
+          </a:prstGeom>
+          <a:solidFill>
+            <a:srgbClr val="E2E8F0"/>
+          </a:solidFill>
+          <a:ln w="12700">
+            <a:solidFill>
+              <a:srgbClr val="E2E8F0"/>
+            </a:solidFill>
+            <a:prstDash val="solid"/>
+          </a:ln>
+        </p:spPr>
+      </p:sp>
+      <p:sp>
+        <p:nvSpPr>
+          <p:cNvPr id="31" name="Text 29"/>
+          <p:cNvSpPr/>
+          <p:nvPr/>
+        </p:nvSpPr>
+        <p:spPr>
+          <a:xfrm>
+            <a:off x="365760" y="4096512"/>
+            <a:ext cx="1371600" cy="804672"/>
           </a:xfrm>
           <a:prstGeom prst="rect">
             <a:avLst/>
@@ -13708,96 +13616,30 @@
               <a:buNone/>
             </a:pPr>
             <a:r>
-              <a:rPr lang="en-US" sz="1600" b="1" dirty="0">
-                <a:solidFill>
-                  <a:srgbClr val="0D9488"/>
+              <a:rPr lang="en-US" sz="1100" b="1" dirty="0">
+                <a:solidFill>
+                  <a:srgbClr val="475569"/>
                 </a:solidFill>
                 <a:latin typeface="Trebuchet MS" pitchFamily="34" charset="0"/>
                 <a:ea typeface="Trebuchet MS" pitchFamily="34" charset="-122"/>
                 <a:cs typeface="Trebuchet MS" pitchFamily="34" charset="-120"/>
               </a:rPr>
-              <a:t>·</a:t>
-            </a:r>
-            <a:endParaRPr lang="en-US" sz="1600" dirty="0"/>
-          </a:p>
-        </p:txBody>
-      </p:sp>
-      <p:sp>
-        <p:nvSpPr>
-          <p:cNvPr id="31" name="Shape 29"/>
-          <p:cNvSpPr/>
-          <p:nvPr/>
-        </p:nvSpPr>
-        <p:spPr>
-          <a:xfrm>
-            <a:off x="5742432" y="3364992"/>
-            <a:ext cx="1645920" cy="475488"/>
-          </a:xfrm>
-          <a:prstGeom prst="rect">
-            <a:avLst>
-              <a:gd name="adj" fmla="val 9615"/>
-            </a:avLst>
-          </a:prstGeom>
-          <a:solidFill>
-            <a:srgbClr val="FFFFFF"/>
-          </a:solidFill>
-          <a:ln w="12700">
-            <a:solidFill>
-              <a:srgbClr val="0D9488"/>
-            </a:solidFill>
-            <a:prstDash val="solid"/>
-          </a:ln>
-        </p:spPr>
-      </p:sp>
-      <p:sp>
-        <p:nvSpPr>
-          <p:cNvPr id="32" name="Text 30"/>
-          <p:cNvSpPr/>
-          <p:nvPr/>
-        </p:nvSpPr>
-        <p:spPr>
-          <a:xfrm>
-            <a:off x="5742432" y="3364992"/>
-            <a:ext cx="1645920" cy="475488"/>
-          </a:xfrm>
-          <a:prstGeom prst="rect">
-            <a:avLst/>
-          </a:prstGeom>
-          <a:noFill/>
-          <a:ln/>
-        </p:spPr>
-        <p:txBody>
-          <a:bodyPr wrap="square" lIns="0" tIns="0" rIns="0" bIns="0" rtlCol="0" anchor="ctr"/>
-          <a:lstStyle/>
-          <a:p>
-            <a:pPr algn="ctr" indent="0" marL="0">
-              <a:buNone/>
-            </a:pPr>
-            <a:r>
-              <a:rPr lang="en-US" sz="1400" b="1" dirty="0">
-                <a:solidFill>
-                  <a:srgbClr val="0D9488"/>
-                </a:solidFill>
-                <a:latin typeface="Trebuchet MS" pitchFamily="34" charset="0"/>
-                <a:ea typeface="Trebuchet MS" pitchFamily="34" charset="-122"/>
-                <a:cs typeface="Trebuchet MS" pitchFamily="34" charset="-120"/>
-              </a:rPr>
-              <a:t>ers</a:t>
-            </a:r>
-            <a:endParaRPr lang="en-US" sz="1400" dirty="0"/>
-          </a:p>
-        </p:txBody>
-      </p:sp>
-      <p:sp>
-        <p:nvSpPr>
-          <p:cNvPr id="33" name="Shape 31"/>
-          <p:cNvSpPr/>
-          <p:nvPr/>
-        </p:nvSpPr>
-        <p:spPr>
-          <a:xfrm>
-            <a:off x="365760" y="4096512"/>
-            <a:ext cx="1371600" cy="804672"/>
+              <a:t>Phonemes</a:t>
+            </a:r>
+            <a:endParaRPr lang="en-US" sz="1100" dirty="0"/>
+          </a:p>
+        </p:txBody>
+      </p:sp>
+      <p:sp>
+        <p:nvSpPr>
+          <p:cNvPr id="32" name="Shape 30"/>
+          <p:cNvSpPr/>
+          <p:nvPr/>
+        </p:nvSpPr>
+        <p:spPr>
+          <a:xfrm>
+            <a:off x="1874520" y="4096512"/>
+            <a:ext cx="6903720" cy="804672"/>
           </a:xfrm>
           <a:prstGeom prst="rect">
             <a:avLst>
@@ -13805,85 +13647,19 @@
             </a:avLst>
           </a:prstGeom>
           <a:solidFill>
-            <a:srgbClr val="E2E8F0"/>
+            <a:srgbClr val="F8FAFC"/>
           </a:solidFill>
           <a:ln w="12700">
             <a:solidFill>
               <a:srgbClr val="E2E8F0"/>
             </a:solidFill>
-            <a:prstDash val="solid"/>
-          </a:ln>
-        </p:spPr>
-      </p:sp>
-      <p:sp>
-        <p:nvSpPr>
-          <p:cNvPr id="34" name="Text 32"/>
-          <p:cNvSpPr/>
-          <p:nvPr/>
-        </p:nvSpPr>
-        <p:spPr>
-          <a:xfrm>
-            <a:off x="365760" y="4096512"/>
-            <a:ext cx="1371600" cy="804672"/>
-          </a:xfrm>
-          <a:prstGeom prst="rect">
-            <a:avLst/>
-          </a:prstGeom>
-          <a:noFill/>
-          <a:ln/>
-        </p:spPr>
-        <p:txBody>
-          <a:bodyPr wrap="square" lIns="0" tIns="0" rIns="0" bIns="0" rtlCol="0" anchor="ctr"/>
-          <a:lstStyle/>
-          <a:p>
-            <a:pPr algn="ctr" indent="0" marL="0">
-              <a:buNone/>
-            </a:pPr>
-            <a:r>
-              <a:rPr lang="en-US" sz="1100" b="1" dirty="0">
-                <a:solidFill>
-                  <a:srgbClr val="475569"/>
-                </a:solidFill>
-                <a:latin typeface="Trebuchet MS" pitchFamily="34" charset="0"/>
-                <a:ea typeface="Trebuchet MS" pitchFamily="34" charset="-122"/>
-                <a:cs typeface="Trebuchet MS" pitchFamily="34" charset="-120"/>
-              </a:rPr>
-              <a:t>Phonemes</a:t>
-            </a:r>
-            <a:endParaRPr lang="en-US" sz="1100" dirty="0"/>
-          </a:p>
-        </p:txBody>
-      </p:sp>
-      <p:sp>
-        <p:nvSpPr>
-          <p:cNvPr id="35" name="Shape 33"/>
-          <p:cNvSpPr/>
-          <p:nvPr/>
-        </p:nvSpPr>
-        <p:spPr>
-          <a:xfrm>
-            <a:off x="1874520" y="4096512"/>
-            <a:ext cx="6903720" cy="804672"/>
-          </a:xfrm>
-          <a:prstGeom prst="rect">
-            <a:avLst>
-              <a:gd name="adj" fmla="val 6818"/>
-            </a:avLst>
-          </a:prstGeom>
-          <a:solidFill>
-            <a:srgbClr val="F8FAFC"/>
-          </a:solidFill>
-          <a:ln w="12700">
-            <a:solidFill>
-              <a:srgbClr val="E2E8F0"/>
-            </a:solidFill>
             <a:prstDash val="dash"/>
           </a:ln>
         </p:spPr>
       </p:sp>
       <p:sp>
         <p:nvSpPr>
-          <p:cNvPr id="36" name="Text 34"/>
+          <p:cNvPr id="33" name="Text 31"/>
           <p:cNvSpPr/>
           <p:nvPr/>
         </p:nvSpPr>
@@ -14115,7 +13891,7 @@
                 <a:ea typeface="Calibri" pitchFamily="34" charset="-122"/>
                 <a:cs typeface="Calibri" pitchFamily="34" charset="-120"/>
               </a:rPr>
-              <a:t>Root 'meet' — to come together, join</a:t>
+              <a:t>Root 'meet' — come together, encounter</a:t>
             </a:r>
             <a:endParaRPr lang="en-US" sz="1600" dirty="0"/>
           </a:p>
@@ -14471,7 +14247,7 @@
                 <a:ea typeface="Calibri" pitchFamily="34" charset="-122"/>
                 <a:cs typeface="Calibri" pitchFamily="34" charset="-120"/>
               </a:rPr>
-              <a:t>Word Labs  •  wordlabs.app  •  Root: 'meet' = to come together, join</a:t>
+              <a:t>Word Labs  •  wordlabs.app  •  Root: 'meet' = come together, encounter</a:t>
             </a:r>
             <a:endParaRPr lang="en-US" sz="800" dirty="0"/>
           </a:p>
@@ -14610,7 +14386,7 @@
                 <a:ea typeface="Trebuchet MS" pitchFamily="34" charset="-122"/>
                 <a:cs typeface="Trebuchet MS" pitchFamily="34" charset="-120"/>
               </a:rPr>
-              <a:t>meeters</a:t>
+              <a:t>meeting</a:t>
             </a:r>
             <a:endParaRPr lang="en-US" sz="2800" dirty="0"/>
           </a:p>
@@ -14690,7 +14466,7 @@
         </p:nvSpPr>
         <p:spPr>
           <a:xfrm>
-            <a:off x="2221992" y="2258568"/>
+            <a:off x="2938272" y="2258568"/>
             <a:ext cx="1828800" cy="292608"/>
           </a:xfrm>
           <a:prstGeom prst="rect">
@@ -14724,7 +14500,7 @@
         </p:nvSpPr>
         <p:spPr>
           <a:xfrm>
-            <a:off x="2221992" y="2258568"/>
+            <a:off x="2938272" y="2258568"/>
             <a:ext cx="1828800" cy="292608"/>
           </a:xfrm>
           <a:prstGeom prst="rect">
@@ -14763,7 +14539,7 @@
         </p:nvSpPr>
         <p:spPr>
           <a:xfrm>
-            <a:off x="2221992" y="2569464"/>
+            <a:off x="2938272" y="2569464"/>
             <a:ext cx="1828800" cy="201168"/>
           </a:xfrm>
           <a:prstGeom prst="rect">
@@ -14788,7 +14564,7 @@
                 <a:ea typeface="Calibri" pitchFamily="34" charset="-122"/>
                 <a:cs typeface="Calibri" pitchFamily="34" charset="-120"/>
               </a:rPr>
-              <a:t>to come together</a:t>
+              <a:t>come together</a:t>
             </a:r>
             <a:endParaRPr lang="en-US" sz="850" dirty="0"/>
           </a:p>
@@ -14802,7 +14578,7 @@
         </p:nvSpPr>
         <p:spPr>
           <a:xfrm>
-            <a:off x="4370832" y="2258568"/>
+            <a:off x="5803392" y="2258568"/>
             <a:ext cx="1828800" cy="292608"/>
           </a:xfrm>
           <a:prstGeom prst="rect">
@@ -14836,7 +14612,7 @@
         </p:nvSpPr>
         <p:spPr>
           <a:xfrm>
-            <a:off x="4370832" y="2258568"/>
+            <a:off x="5803392" y="2258568"/>
             <a:ext cx="1828800" cy="292608"/>
           </a:xfrm>
           <a:prstGeom prst="rect">
@@ -14861,7 +14637,7 @@
                 <a:ea typeface="Trebuchet MS" pitchFamily="34" charset="-122"/>
                 <a:cs typeface="Trebuchet MS" pitchFamily="34" charset="-120"/>
               </a:rPr>
-              <a:t>er</a:t>
+              <a:t>ing</a:t>
             </a:r>
             <a:endParaRPr lang="en-US" sz="1300" dirty="0"/>
           </a:p>
@@ -14875,7 +14651,7 @@
         </p:nvSpPr>
         <p:spPr>
           <a:xfrm>
-            <a:off x="4370832" y="2569464"/>
+            <a:off x="5803392" y="2569464"/>
             <a:ext cx="1828800" cy="201168"/>
           </a:xfrm>
           <a:prstGeom prst="rect">
@@ -14900,7 +14676,7 @@
                 <a:ea typeface="Calibri" pitchFamily="34" charset="-122"/>
                 <a:cs typeface="Calibri" pitchFamily="34" charset="-120"/>
               </a:rPr>
-              <a:t>one who does</a:t>
+              <a:t>action or process</a:t>
             </a:r>
             <a:endParaRPr lang="en-US" sz="850" dirty="0"/>
           </a:p>
@@ -14914,30 +14690,23 @@
         </p:nvSpPr>
         <p:spPr>
           <a:xfrm>
-            <a:off x="6519672" y="2258568"/>
-            <a:ext cx="1828800" cy="292608"/>
+            <a:off x="365760" y="3273552"/>
+            <a:ext cx="1371600" cy="658368"/>
           </a:xfrm>
           <a:prstGeom prst="rect">
             <a:avLst>
-              <a:gd name="adj" fmla="val 25000"/>
+              <a:gd name="adj" fmla="val 8333"/>
             </a:avLst>
           </a:prstGeom>
           <a:solidFill>
-            <a:srgbClr val="FCE7F3"/>
-          </a:solidFill>
-          <a:ln w="19050">
-            <a:solidFill>
-              <a:srgbClr val="DB2777"/>
-            </a:solidFill>
-            <a:prstDash val="solid"/>
-          </a:ln>
-          <a:effectLst>
-            <a:outerShdw sx="100000" sy="100000" kx="0" ky="0" algn="bl" rotWithShape="0" blurRad="101600" dist="38100" dir="8100000">
-              <a:srgbClr val="000000">
-                <a:alpha val="12000"/>
-              </a:srgbClr>
-            </a:outerShdw>
-          </a:effectLst>
+            <a:srgbClr val="E2E8F0"/>
+          </a:solidFill>
+          <a:ln w="12700">
+            <a:solidFill>
+              <a:srgbClr val="E2E8F0"/>
+            </a:solidFill>
+            <a:prstDash val="solid"/>
+          </a:ln>
         </p:spPr>
       </p:sp>
       <p:sp>
@@ -14948,8 +14717,8 @@
         </p:nvSpPr>
         <p:spPr>
           <a:xfrm>
-            <a:off x="6519672" y="2258568"/>
-            <a:ext cx="1828800" cy="292608"/>
+            <a:off x="365760" y="3273552"/>
+            <a:ext cx="1371600" cy="658368"/>
           </a:xfrm>
           <a:prstGeom prst="rect">
             <a:avLst/>
@@ -14965,69 +14734,30 @@
               <a:buNone/>
             </a:pPr>
             <a:r>
-              <a:rPr lang="en-US" sz="1300" b="1" dirty="0">
-                <a:solidFill>
-                  <a:srgbClr val="9D174D"/>
+              <a:rPr lang="en-US" sz="1100" b="1" dirty="0">
+                <a:solidFill>
+                  <a:srgbClr val="475569"/>
                 </a:solidFill>
                 <a:latin typeface="Trebuchet MS" pitchFamily="34" charset="0"/>
                 <a:ea typeface="Trebuchet MS" pitchFamily="34" charset="-122"/>
                 <a:cs typeface="Trebuchet MS" pitchFamily="34" charset="-120"/>
               </a:rPr>
-              <a:t>s</a:t>
-            </a:r>
-            <a:endParaRPr lang="en-US" sz="1300" dirty="0"/>
-          </a:p>
-        </p:txBody>
-      </p:sp>
-      <p:sp>
-        <p:nvSpPr>
-          <p:cNvPr id="24" name="Text 22"/>
-          <p:cNvSpPr/>
-          <p:nvPr/>
-        </p:nvSpPr>
-        <p:spPr>
-          <a:xfrm>
-            <a:off x="6519672" y="2569464"/>
-            <a:ext cx="1828800" cy="201168"/>
-          </a:xfrm>
-          <a:prstGeom prst="rect">
-            <a:avLst/>
-          </a:prstGeom>
-          <a:noFill/>
-          <a:ln/>
-        </p:spPr>
-        <p:txBody>
-          <a:bodyPr wrap="square" lIns="0" tIns="0" rIns="0" bIns="0" rtlCol="0" anchor="t"/>
-          <a:lstStyle/>
-          <a:p>
-            <a:pPr algn="ctr" indent="0" marL="0">
-              <a:buNone/>
-            </a:pPr>
-            <a:r>
-              <a:rPr lang="en-US" sz="850" dirty="0">
-                <a:solidFill>
-                  <a:srgbClr val="475569"/>
-                </a:solidFill>
-                <a:latin typeface="Calibri" pitchFamily="34" charset="0"/>
-                <a:ea typeface="Calibri" pitchFamily="34" charset="-122"/>
-                <a:cs typeface="Calibri" pitchFamily="34" charset="-120"/>
-              </a:rPr>
-              <a:t>more than one</a:t>
-            </a:r>
-            <a:endParaRPr lang="en-US" sz="850" dirty="0"/>
-          </a:p>
-        </p:txBody>
-      </p:sp>
-      <p:sp>
-        <p:nvSpPr>
-          <p:cNvPr id="25" name="Shape 23"/>
-          <p:cNvSpPr/>
-          <p:nvPr/>
-        </p:nvSpPr>
-        <p:spPr>
-          <a:xfrm>
-            <a:off x="365760" y="3273552"/>
-            <a:ext cx="1371600" cy="658368"/>
+              <a:t>Syllables</a:t>
+            </a:r>
+            <a:endParaRPr lang="en-US" sz="1100" dirty="0"/>
+          </a:p>
+        </p:txBody>
+      </p:sp>
+      <p:sp>
+        <p:nvSpPr>
+          <p:cNvPr id="24" name="Shape 22"/>
+          <p:cNvSpPr/>
+          <p:nvPr/>
+        </p:nvSpPr>
+        <p:spPr>
+          <a:xfrm>
+            <a:off x="1874520" y="3273552"/>
+            <a:ext cx="6903720" cy="658368"/>
           </a:xfrm>
           <a:prstGeom prst="rect">
             <a:avLst>
@@ -15035,11 +14765,38 @@
             </a:avLst>
           </a:prstGeom>
           <a:solidFill>
-            <a:srgbClr val="E2E8F0"/>
-          </a:solidFill>
-          <a:ln w="12700">
-            <a:solidFill>
-              <a:srgbClr val="E2E8F0"/>
+            <a:srgbClr val="CCFBF1"/>
+          </a:solidFill>
+          <a:ln w="12700">
+            <a:solidFill>
+              <a:srgbClr val="0D9488"/>
+            </a:solidFill>
+            <a:prstDash val="solid"/>
+          </a:ln>
+        </p:spPr>
+      </p:sp>
+      <p:sp>
+        <p:nvSpPr>
+          <p:cNvPr id="25" name="Shape 23"/>
+          <p:cNvSpPr/>
+          <p:nvPr/>
+        </p:nvSpPr>
+        <p:spPr>
+          <a:xfrm>
+            <a:off x="2999232" y="3364992"/>
+            <a:ext cx="1645920" cy="475488"/>
+          </a:xfrm>
+          <a:prstGeom prst="rect">
+            <a:avLst>
+              <a:gd name="adj" fmla="val 9615"/>
+            </a:avLst>
+          </a:prstGeom>
+          <a:solidFill>
+            <a:srgbClr val="FFFFFF"/>
+          </a:solidFill>
+          <a:ln w="12700">
+            <a:solidFill>
+              <a:srgbClr val="0D9488"/>
             </a:solidFill>
             <a:prstDash val="solid"/>
           </a:ln>
@@ -15053,8 +14810,8 @@
         </p:nvSpPr>
         <p:spPr>
           <a:xfrm>
-            <a:off x="365760" y="3273552"/>
-            <a:ext cx="1371600" cy="658368"/>
+            <a:off x="2999232" y="3364992"/>
+            <a:ext cx="1645920" cy="475488"/>
           </a:xfrm>
           <a:prstGeom prst="rect">
             <a:avLst/>
@@ -15070,15 +14827,186 @@
               <a:buNone/>
             </a:pPr>
             <a:r>
-              <a:rPr lang="en-US" sz="1100" b="1" dirty="0">
-                <a:solidFill>
-                  <a:srgbClr val="475569"/>
+              <a:rPr lang="en-US" sz="1400" b="1" dirty="0">
+                <a:solidFill>
+                  <a:srgbClr val="0D9488"/>
                 </a:solidFill>
                 <a:latin typeface="Trebuchet MS" pitchFamily="34" charset="0"/>
                 <a:ea typeface="Trebuchet MS" pitchFamily="34" charset="-122"/>
                 <a:cs typeface="Trebuchet MS" pitchFamily="34" charset="-120"/>
               </a:rPr>
-              <a:t>Syllables</a:t>
+              <a:t>meet</a:t>
+            </a:r>
+            <a:endParaRPr lang="en-US" sz="1400" dirty="0"/>
+          </a:p>
+        </p:txBody>
+      </p:sp>
+      <p:sp>
+        <p:nvSpPr>
+          <p:cNvPr id="27" name="Text 25"/>
+          <p:cNvSpPr/>
+          <p:nvPr/>
+        </p:nvSpPr>
+        <p:spPr>
+          <a:xfrm>
+            <a:off x="4645152" y="3364992"/>
+            <a:ext cx="1097280" cy="475488"/>
+          </a:xfrm>
+          <a:prstGeom prst="rect">
+            <a:avLst/>
+          </a:prstGeom>
+          <a:noFill/>
+          <a:ln/>
+        </p:spPr>
+        <p:txBody>
+          <a:bodyPr wrap="square" lIns="0" tIns="0" rIns="0" bIns="0" rtlCol="0" anchor="ctr"/>
+          <a:lstStyle/>
+          <a:p>
+            <a:pPr algn="ctr" indent="0" marL="0">
+              <a:buNone/>
+            </a:pPr>
+            <a:r>
+              <a:rPr lang="en-US" sz="1600" b="1" dirty="0">
+                <a:solidFill>
+                  <a:srgbClr val="0D9488"/>
+                </a:solidFill>
+                <a:latin typeface="Trebuchet MS" pitchFamily="34" charset="0"/>
+                <a:ea typeface="Trebuchet MS" pitchFamily="34" charset="-122"/>
+                <a:cs typeface="Trebuchet MS" pitchFamily="34" charset="-120"/>
+              </a:rPr>
+              <a:t>·</a:t>
+            </a:r>
+            <a:endParaRPr lang="en-US" sz="1600" dirty="0"/>
+          </a:p>
+        </p:txBody>
+      </p:sp>
+      <p:sp>
+        <p:nvSpPr>
+          <p:cNvPr id="28" name="Shape 26"/>
+          <p:cNvSpPr/>
+          <p:nvPr/>
+        </p:nvSpPr>
+        <p:spPr>
+          <a:xfrm>
+            <a:off x="5742432" y="3364992"/>
+            <a:ext cx="1645920" cy="475488"/>
+          </a:xfrm>
+          <a:prstGeom prst="rect">
+            <a:avLst>
+              <a:gd name="adj" fmla="val 9615"/>
+            </a:avLst>
+          </a:prstGeom>
+          <a:solidFill>
+            <a:srgbClr val="FFFFFF"/>
+          </a:solidFill>
+          <a:ln w="12700">
+            <a:solidFill>
+              <a:srgbClr val="0D9488"/>
+            </a:solidFill>
+            <a:prstDash val="solid"/>
+          </a:ln>
+        </p:spPr>
+      </p:sp>
+      <p:sp>
+        <p:nvSpPr>
+          <p:cNvPr id="29" name="Text 27"/>
+          <p:cNvSpPr/>
+          <p:nvPr/>
+        </p:nvSpPr>
+        <p:spPr>
+          <a:xfrm>
+            <a:off x="5742432" y="3364992"/>
+            <a:ext cx="1645920" cy="475488"/>
+          </a:xfrm>
+          <a:prstGeom prst="rect">
+            <a:avLst/>
+          </a:prstGeom>
+          <a:noFill/>
+          <a:ln/>
+        </p:spPr>
+        <p:txBody>
+          <a:bodyPr wrap="square" lIns="0" tIns="0" rIns="0" bIns="0" rtlCol="0" anchor="ctr"/>
+          <a:lstStyle/>
+          <a:p>
+            <a:pPr algn="ctr" indent="0" marL="0">
+              <a:buNone/>
+            </a:pPr>
+            <a:r>
+              <a:rPr lang="en-US" sz="1400" b="1" dirty="0">
+                <a:solidFill>
+                  <a:srgbClr val="0D9488"/>
+                </a:solidFill>
+                <a:latin typeface="Trebuchet MS" pitchFamily="34" charset="0"/>
+                <a:ea typeface="Trebuchet MS" pitchFamily="34" charset="-122"/>
+                <a:cs typeface="Trebuchet MS" pitchFamily="34" charset="-120"/>
+              </a:rPr>
+              <a:t>ing</a:t>
+            </a:r>
+            <a:endParaRPr lang="en-US" sz="1400" dirty="0"/>
+          </a:p>
+        </p:txBody>
+      </p:sp>
+      <p:sp>
+        <p:nvSpPr>
+          <p:cNvPr id="30" name="Shape 28"/>
+          <p:cNvSpPr/>
+          <p:nvPr/>
+        </p:nvSpPr>
+        <p:spPr>
+          <a:xfrm>
+            <a:off x="365760" y="4096512"/>
+            <a:ext cx="1371600" cy="804672"/>
+          </a:xfrm>
+          <a:prstGeom prst="rect">
+            <a:avLst>
+              <a:gd name="adj" fmla="val 6818"/>
+            </a:avLst>
+          </a:prstGeom>
+          <a:solidFill>
+            <a:srgbClr val="E2E8F0"/>
+          </a:solidFill>
+          <a:ln w="12700">
+            <a:solidFill>
+              <a:srgbClr val="E2E8F0"/>
+            </a:solidFill>
+            <a:prstDash val="solid"/>
+          </a:ln>
+        </p:spPr>
+      </p:sp>
+      <p:sp>
+        <p:nvSpPr>
+          <p:cNvPr id="31" name="Text 29"/>
+          <p:cNvSpPr/>
+          <p:nvPr/>
+        </p:nvSpPr>
+        <p:spPr>
+          <a:xfrm>
+            <a:off x="365760" y="4096512"/>
+            <a:ext cx="1371600" cy="804672"/>
+          </a:xfrm>
+          <a:prstGeom prst="rect">
+            <a:avLst/>
+          </a:prstGeom>
+          <a:noFill/>
+          <a:ln/>
+        </p:spPr>
+        <p:txBody>
+          <a:bodyPr wrap="square" lIns="0" tIns="0" rIns="0" bIns="0" rtlCol="0" anchor="ctr"/>
+          <a:lstStyle/>
+          <a:p>
+            <a:pPr algn="ctr" indent="0" marL="0">
+              <a:buNone/>
+            </a:pPr>
+            <a:r>
+              <a:rPr lang="en-US" sz="1100" b="1" dirty="0">
+                <a:solidFill>
+                  <a:srgbClr val="475569"/>
+                </a:solidFill>
+                <a:latin typeface="Trebuchet MS" pitchFamily="34" charset="0"/>
+                <a:ea typeface="Trebuchet MS" pitchFamily="34" charset="-122"/>
+                <a:cs typeface="Trebuchet MS" pitchFamily="34" charset="-120"/>
+              </a:rPr>
+              <a:t>Phonemes</a:t>
             </a:r>
             <a:endParaRPr lang="en-US" sz="1100" dirty="0"/>
           </a:p>
@@ -15086,13 +15014,13 @@
       </p:sp>
       <p:sp>
         <p:nvSpPr>
-          <p:cNvPr id="27" name="Shape 25"/>
-          <p:cNvSpPr/>
-          <p:nvPr/>
-        </p:nvSpPr>
-        <p:spPr>
-          <a:xfrm>
-            <a:off x="1874520" y="3273552"/>
+          <p:cNvPr id="32" name="Shape 30"/>
+          <p:cNvSpPr/>
+          <p:nvPr/>
+        </p:nvSpPr>
+        <p:spPr>
+          <a:xfrm>
+            <a:off x="1874520" y="4096512"/>
             <a:ext cx="6903720" cy="658368"/>
           </a:xfrm>
           <a:prstGeom prst="rect">
@@ -15101,30 +15029,30 @@
             </a:avLst>
           </a:prstGeom>
           <a:solidFill>
-            <a:srgbClr val="CCFBF1"/>
-          </a:solidFill>
-          <a:ln w="12700">
-            <a:solidFill>
-              <a:srgbClr val="0D9488"/>
-            </a:solidFill>
-            <a:prstDash val="solid"/>
-          </a:ln>
-        </p:spPr>
-      </p:sp>
-      <p:sp>
-        <p:nvSpPr>
-          <p:cNvPr id="28" name="Shape 26"/>
-          <p:cNvSpPr/>
-          <p:nvPr/>
-        </p:nvSpPr>
-        <p:spPr>
-          <a:xfrm>
-            <a:off x="2999232" y="3364992"/>
-            <a:ext cx="1645920" cy="475488"/>
+            <a:srgbClr val="FCE7F3"/>
+          </a:solidFill>
+          <a:ln w="12700">
+            <a:solidFill>
+              <a:srgbClr val="DB2777"/>
+            </a:solidFill>
+            <a:prstDash val="solid"/>
+          </a:ln>
+        </p:spPr>
+      </p:sp>
+      <p:sp>
+        <p:nvSpPr>
+          <p:cNvPr id="33" name="Shape 31"/>
+          <p:cNvSpPr/>
+          <p:nvPr/>
+        </p:nvSpPr>
+        <p:spPr>
+          <a:xfrm>
+            <a:off x="2427732" y="4169664"/>
+            <a:ext cx="685800" cy="475488"/>
           </a:xfrm>
           <a:prstGeom prst="rect">
             <a:avLst>
-              <a:gd name="adj" fmla="val 9615"/>
+              <a:gd name="adj" fmla="val 7692"/>
             </a:avLst>
           </a:prstGeom>
           <a:solidFill>
@@ -15132,22 +15060,22 @@
           </a:solidFill>
           <a:ln w="12700">
             <a:solidFill>
-              <a:srgbClr val="0D9488"/>
-            </a:solidFill>
-            <a:prstDash val="solid"/>
-          </a:ln>
-        </p:spPr>
-      </p:sp>
-      <p:sp>
-        <p:nvSpPr>
-          <p:cNvPr id="29" name="Text 27"/>
-          <p:cNvSpPr/>
-          <p:nvPr/>
-        </p:nvSpPr>
-        <p:spPr>
-          <a:xfrm>
-            <a:off x="2999232" y="3364992"/>
-            <a:ext cx="1645920" cy="475488"/>
+              <a:srgbClr val="DB2777"/>
+            </a:solidFill>
+            <a:prstDash val="solid"/>
+          </a:ln>
+        </p:spPr>
+      </p:sp>
+      <p:sp>
+        <p:nvSpPr>
+          <p:cNvPr id="34" name="Text 32"/>
+          <p:cNvSpPr/>
+          <p:nvPr/>
+        </p:nvSpPr>
+        <p:spPr>
+          <a:xfrm>
+            <a:off x="2427732" y="4169664"/>
+            <a:ext cx="685800" cy="475488"/>
           </a:xfrm>
           <a:prstGeom prst="rect">
             <a:avLst/>
@@ -15163,30 +15091,57 @@
               <a:buNone/>
             </a:pPr>
             <a:r>
-              <a:rPr lang="en-US" sz="1400" b="1" dirty="0">
-                <a:solidFill>
-                  <a:srgbClr val="0D9488"/>
+              <a:rPr lang="en-US" sz="900" b="1" dirty="0">
+                <a:solidFill>
+                  <a:srgbClr val="9D174D"/>
                 </a:solidFill>
                 <a:latin typeface="Trebuchet MS" pitchFamily="34" charset="0"/>
                 <a:ea typeface="Trebuchet MS" pitchFamily="34" charset="-122"/>
                 <a:cs typeface="Trebuchet MS" pitchFamily="34" charset="-120"/>
               </a:rPr>
-              <a:t>meet</a:t>
-            </a:r>
-            <a:endParaRPr lang="en-US" sz="1400" dirty="0"/>
-          </a:p>
-        </p:txBody>
-      </p:sp>
-      <p:sp>
-        <p:nvSpPr>
-          <p:cNvPr id="30" name="Text 28"/>
-          <p:cNvSpPr/>
-          <p:nvPr/>
-        </p:nvSpPr>
-        <p:spPr>
-          <a:xfrm>
-            <a:off x="4645152" y="3364992"/>
-            <a:ext cx="1097280" cy="475488"/>
+              <a:t>m</a:t>
+            </a:r>
+            <a:endParaRPr lang="en-US" sz="900" dirty="0"/>
+          </a:p>
+        </p:txBody>
+      </p:sp>
+      <p:sp>
+        <p:nvSpPr>
+          <p:cNvPr id="35" name="Shape 33"/>
+          <p:cNvSpPr/>
+          <p:nvPr/>
+        </p:nvSpPr>
+        <p:spPr>
+          <a:xfrm>
+            <a:off x="3639312" y="4169664"/>
+            <a:ext cx="685800" cy="475488"/>
+          </a:xfrm>
+          <a:prstGeom prst="rect">
+            <a:avLst>
+              <a:gd name="adj" fmla="val 7692"/>
+            </a:avLst>
+          </a:prstGeom>
+          <a:solidFill>
+            <a:srgbClr val="FFFFFF"/>
+          </a:solidFill>
+          <a:ln w="12700">
+            <a:solidFill>
+              <a:srgbClr val="DB2777"/>
+            </a:solidFill>
+            <a:prstDash val="solid"/>
+          </a:ln>
+        </p:spPr>
+      </p:sp>
+      <p:sp>
+        <p:nvSpPr>
+          <p:cNvPr id="36" name="Text 34"/>
+          <p:cNvSpPr/>
+          <p:nvPr/>
+        </p:nvSpPr>
+        <p:spPr>
+          <a:xfrm>
+            <a:off x="3639312" y="4169664"/>
+            <a:ext cx="685800" cy="475488"/>
           </a:xfrm>
           <a:prstGeom prst="rect">
             <a:avLst/>
@@ -15202,34 +15157,34 @@
               <a:buNone/>
             </a:pPr>
             <a:r>
-              <a:rPr lang="en-US" sz="1600" b="1" dirty="0">
-                <a:solidFill>
-                  <a:srgbClr val="0D9488"/>
+              <a:rPr lang="en-US" sz="900" b="1" dirty="0">
+                <a:solidFill>
+                  <a:srgbClr val="9D174D"/>
                 </a:solidFill>
                 <a:latin typeface="Trebuchet MS" pitchFamily="34" charset="0"/>
                 <a:ea typeface="Trebuchet MS" pitchFamily="34" charset="-122"/>
                 <a:cs typeface="Trebuchet MS" pitchFamily="34" charset="-120"/>
               </a:rPr>
-              <a:t>·</a:t>
-            </a:r>
-            <a:endParaRPr lang="en-US" sz="1600" dirty="0"/>
-          </a:p>
-        </p:txBody>
-      </p:sp>
-      <p:sp>
-        <p:nvSpPr>
-          <p:cNvPr id="31" name="Shape 29"/>
-          <p:cNvSpPr/>
-          <p:nvPr/>
-        </p:nvSpPr>
-        <p:spPr>
-          <a:xfrm>
-            <a:off x="5742432" y="3364992"/>
-            <a:ext cx="1645920" cy="475488"/>
+              <a:t>ee</a:t>
+            </a:r>
+            <a:endParaRPr lang="en-US" sz="900" dirty="0"/>
+          </a:p>
+        </p:txBody>
+      </p:sp>
+      <p:sp>
+        <p:nvSpPr>
+          <p:cNvPr id="37" name="Shape 35"/>
+          <p:cNvSpPr/>
+          <p:nvPr/>
+        </p:nvSpPr>
+        <p:spPr>
+          <a:xfrm>
+            <a:off x="4850892" y="4169664"/>
+            <a:ext cx="685800" cy="475488"/>
           </a:xfrm>
           <a:prstGeom prst="rect">
             <a:avLst>
-              <a:gd name="adj" fmla="val 9615"/>
+              <a:gd name="adj" fmla="val 7692"/>
             </a:avLst>
           </a:prstGeom>
           <a:solidFill>
@@ -15237,22 +15192,22 @@
           </a:solidFill>
           <a:ln w="12700">
             <a:solidFill>
-              <a:srgbClr val="0D9488"/>
-            </a:solidFill>
-            <a:prstDash val="solid"/>
-          </a:ln>
-        </p:spPr>
-      </p:sp>
-      <p:sp>
-        <p:nvSpPr>
-          <p:cNvPr id="32" name="Text 30"/>
-          <p:cNvSpPr/>
-          <p:nvPr/>
-        </p:nvSpPr>
-        <p:spPr>
-          <a:xfrm>
-            <a:off x="5742432" y="3364992"/>
-            <a:ext cx="1645920" cy="475488"/>
+              <a:srgbClr val="DB2777"/>
+            </a:solidFill>
+            <a:prstDash val="solid"/>
+          </a:ln>
+        </p:spPr>
+      </p:sp>
+      <p:sp>
+        <p:nvSpPr>
+          <p:cNvPr id="38" name="Text 36"/>
+          <p:cNvSpPr/>
+          <p:nvPr/>
+        </p:nvSpPr>
+        <p:spPr>
+          <a:xfrm>
+            <a:off x="4850892" y="4169664"/>
+            <a:ext cx="685800" cy="475488"/>
           </a:xfrm>
           <a:prstGeom prst="rect">
             <a:avLst/>
@@ -15268,57 +15223,57 @@
               <a:buNone/>
             </a:pPr>
             <a:r>
-              <a:rPr lang="en-US" sz="1400" b="1" dirty="0">
-                <a:solidFill>
-                  <a:srgbClr val="0D9488"/>
+              <a:rPr lang="en-US" sz="900" b="1" dirty="0">
+                <a:solidFill>
+                  <a:srgbClr val="9D174D"/>
                 </a:solidFill>
                 <a:latin typeface="Trebuchet MS" pitchFamily="34" charset="0"/>
                 <a:ea typeface="Trebuchet MS" pitchFamily="34" charset="-122"/>
                 <a:cs typeface="Trebuchet MS" pitchFamily="34" charset="-120"/>
               </a:rPr>
-              <a:t>ers</a:t>
-            </a:r>
-            <a:endParaRPr lang="en-US" sz="1400" dirty="0"/>
-          </a:p>
-        </p:txBody>
-      </p:sp>
-      <p:sp>
-        <p:nvSpPr>
-          <p:cNvPr id="33" name="Shape 31"/>
-          <p:cNvSpPr/>
-          <p:nvPr/>
-        </p:nvSpPr>
-        <p:spPr>
-          <a:xfrm>
-            <a:off x="365760" y="4096512"/>
-            <a:ext cx="1371600" cy="804672"/>
+              <a:t>t</a:t>
+            </a:r>
+            <a:endParaRPr lang="en-US" sz="900" dirty="0"/>
+          </a:p>
+        </p:txBody>
+      </p:sp>
+      <p:sp>
+        <p:nvSpPr>
+          <p:cNvPr id="39" name="Shape 37"/>
+          <p:cNvSpPr/>
+          <p:nvPr/>
+        </p:nvSpPr>
+        <p:spPr>
+          <a:xfrm>
+            <a:off x="6062472" y="4169664"/>
+            <a:ext cx="685800" cy="475488"/>
           </a:xfrm>
           <a:prstGeom prst="rect">
             <a:avLst>
-              <a:gd name="adj" fmla="val 6818"/>
+              <a:gd name="adj" fmla="val 7692"/>
             </a:avLst>
           </a:prstGeom>
           <a:solidFill>
-            <a:srgbClr val="E2E8F0"/>
-          </a:solidFill>
-          <a:ln w="12700">
-            <a:solidFill>
-              <a:srgbClr val="E2E8F0"/>
-            </a:solidFill>
-            <a:prstDash val="solid"/>
-          </a:ln>
-        </p:spPr>
-      </p:sp>
-      <p:sp>
-        <p:nvSpPr>
-          <p:cNvPr id="34" name="Text 32"/>
-          <p:cNvSpPr/>
-          <p:nvPr/>
-        </p:nvSpPr>
-        <p:spPr>
-          <a:xfrm>
-            <a:off x="365760" y="4096512"/>
-            <a:ext cx="1371600" cy="804672"/>
+            <a:srgbClr val="FFFFFF"/>
+          </a:solidFill>
+          <a:ln w="12700">
+            <a:solidFill>
+              <a:srgbClr val="DB2777"/>
+            </a:solidFill>
+            <a:prstDash val="solid"/>
+          </a:ln>
+        </p:spPr>
+      </p:sp>
+      <p:sp>
+        <p:nvSpPr>
+          <p:cNvPr id="40" name="Text 38"/>
+          <p:cNvSpPr/>
+          <p:nvPr/>
+        </p:nvSpPr>
+        <p:spPr>
+          <a:xfrm>
+            <a:off x="6062472" y="4169664"/>
+            <a:ext cx="685800" cy="475488"/>
           </a:xfrm>
           <a:prstGeom prst="rect">
             <a:avLst/>
@@ -15334,56 +15289,29 @@
               <a:buNone/>
             </a:pPr>
             <a:r>
-              <a:rPr lang="en-US" sz="1100" b="1" dirty="0">
-                <a:solidFill>
-                  <a:srgbClr val="475569"/>
+              <a:rPr lang="en-US" sz="900" b="1" dirty="0">
+                <a:solidFill>
+                  <a:srgbClr val="9D174D"/>
                 </a:solidFill>
                 <a:latin typeface="Trebuchet MS" pitchFamily="34" charset="0"/>
                 <a:ea typeface="Trebuchet MS" pitchFamily="34" charset="-122"/>
                 <a:cs typeface="Trebuchet MS" pitchFamily="34" charset="-120"/>
               </a:rPr>
-              <a:t>Phonemes</a:t>
-            </a:r>
-            <a:endParaRPr lang="en-US" sz="1100" dirty="0"/>
-          </a:p>
-        </p:txBody>
-      </p:sp>
-      <p:sp>
-        <p:nvSpPr>
-          <p:cNvPr id="35" name="Shape 33"/>
-          <p:cNvSpPr/>
-          <p:nvPr/>
-        </p:nvSpPr>
-        <p:spPr>
-          <a:xfrm>
-            <a:off x="1874520" y="4096512"/>
-            <a:ext cx="6903720" cy="658368"/>
-          </a:xfrm>
-          <a:prstGeom prst="rect">
-            <a:avLst>
-              <a:gd name="adj" fmla="val 8333"/>
-            </a:avLst>
-          </a:prstGeom>
-          <a:solidFill>
-            <a:srgbClr val="FCE7F3"/>
-          </a:solidFill>
-          <a:ln w="12700">
-            <a:solidFill>
-              <a:srgbClr val="DB2777"/>
-            </a:solidFill>
-            <a:prstDash val="solid"/>
-          </a:ln>
-        </p:spPr>
-      </p:sp>
-      <p:sp>
-        <p:nvSpPr>
-          <p:cNvPr id="36" name="Shape 34"/>
-          <p:cNvSpPr/>
-          <p:nvPr/>
-        </p:nvSpPr>
-        <p:spPr>
-          <a:xfrm>
-            <a:off x="2427732" y="4169664"/>
+              <a:t>i</a:t>
+            </a:r>
+            <a:endParaRPr lang="en-US" sz="900" dirty="0"/>
+          </a:p>
+        </p:txBody>
+      </p:sp>
+      <p:sp>
+        <p:nvSpPr>
+          <p:cNvPr id="41" name="Shape 39"/>
+          <p:cNvSpPr/>
+          <p:nvPr/>
+        </p:nvSpPr>
+        <p:spPr>
+          <a:xfrm>
+            <a:off x="7274052" y="4169664"/>
             <a:ext cx="685800" cy="475488"/>
           </a:xfrm>
           <a:prstGeom prst="rect">
@@ -15404,13 +15332,13 @@
       </p:sp>
       <p:sp>
         <p:nvSpPr>
-          <p:cNvPr id="37" name="Text 35"/>
-          <p:cNvSpPr/>
-          <p:nvPr/>
-        </p:nvSpPr>
-        <p:spPr>
-          <a:xfrm>
-            <a:off x="2427732" y="4169664"/>
+          <p:cNvPr id="42" name="Text 40"/>
+          <p:cNvSpPr/>
+          <p:nvPr/>
+        </p:nvSpPr>
+        <p:spPr>
+          <a:xfrm>
+            <a:off x="7274052" y="4169664"/>
             <a:ext cx="685800" cy="475488"/>
           </a:xfrm>
           <a:prstGeom prst="rect">
@@ -15435,271 +15363,7 @@
                 <a:ea typeface="Trebuchet MS" pitchFamily="34" charset="-122"/>
                 <a:cs typeface="Trebuchet MS" pitchFamily="34" charset="-120"/>
               </a:rPr>
-              <a:t>m</a:t>
-            </a:r>
-            <a:endParaRPr lang="en-US" sz="900" dirty="0"/>
-          </a:p>
-        </p:txBody>
-      </p:sp>
-      <p:sp>
-        <p:nvSpPr>
-          <p:cNvPr id="38" name="Shape 36"/>
-          <p:cNvSpPr/>
-          <p:nvPr/>
-        </p:nvSpPr>
-        <p:spPr>
-          <a:xfrm>
-            <a:off x="3639312" y="4169664"/>
-            <a:ext cx="685800" cy="475488"/>
-          </a:xfrm>
-          <a:prstGeom prst="rect">
-            <a:avLst>
-              <a:gd name="adj" fmla="val 7692"/>
-            </a:avLst>
-          </a:prstGeom>
-          <a:solidFill>
-            <a:srgbClr val="FFFFFF"/>
-          </a:solidFill>
-          <a:ln w="12700">
-            <a:solidFill>
-              <a:srgbClr val="DB2777"/>
-            </a:solidFill>
-            <a:prstDash val="solid"/>
-          </a:ln>
-        </p:spPr>
-      </p:sp>
-      <p:sp>
-        <p:nvSpPr>
-          <p:cNvPr id="39" name="Text 37"/>
-          <p:cNvSpPr/>
-          <p:nvPr/>
-        </p:nvSpPr>
-        <p:spPr>
-          <a:xfrm>
-            <a:off x="3639312" y="4169664"/>
-            <a:ext cx="685800" cy="475488"/>
-          </a:xfrm>
-          <a:prstGeom prst="rect">
-            <a:avLst/>
-          </a:prstGeom>
-          <a:noFill/>
-          <a:ln/>
-        </p:spPr>
-        <p:txBody>
-          <a:bodyPr wrap="square" lIns="0" tIns="0" rIns="0" bIns="0" rtlCol="0" anchor="ctr"/>
-          <a:lstStyle/>
-          <a:p>
-            <a:pPr algn="ctr" indent="0" marL="0">
-              <a:buNone/>
-            </a:pPr>
-            <a:r>
-              <a:rPr lang="en-US" sz="900" b="1" dirty="0">
-                <a:solidFill>
-                  <a:srgbClr val="9D174D"/>
-                </a:solidFill>
-                <a:latin typeface="Trebuchet MS" pitchFamily="34" charset="0"/>
-                <a:ea typeface="Trebuchet MS" pitchFamily="34" charset="-122"/>
-                <a:cs typeface="Trebuchet MS" pitchFamily="34" charset="-120"/>
-              </a:rPr>
-              <a:t>ee</a:t>
-            </a:r>
-            <a:endParaRPr lang="en-US" sz="900" dirty="0"/>
-          </a:p>
-        </p:txBody>
-      </p:sp>
-      <p:sp>
-        <p:nvSpPr>
-          <p:cNvPr id="40" name="Shape 38"/>
-          <p:cNvSpPr/>
-          <p:nvPr/>
-        </p:nvSpPr>
-        <p:spPr>
-          <a:xfrm>
-            <a:off x="4850892" y="4169664"/>
-            <a:ext cx="685800" cy="475488"/>
-          </a:xfrm>
-          <a:prstGeom prst="rect">
-            <a:avLst>
-              <a:gd name="adj" fmla="val 7692"/>
-            </a:avLst>
-          </a:prstGeom>
-          <a:solidFill>
-            <a:srgbClr val="FFFFFF"/>
-          </a:solidFill>
-          <a:ln w="12700">
-            <a:solidFill>
-              <a:srgbClr val="DB2777"/>
-            </a:solidFill>
-            <a:prstDash val="solid"/>
-          </a:ln>
-        </p:spPr>
-      </p:sp>
-      <p:sp>
-        <p:nvSpPr>
-          <p:cNvPr id="41" name="Text 39"/>
-          <p:cNvSpPr/>
-          <p:nvPr/>
-        </p:nvSpPr>
-        <p:spPr>
-          <a:xfrm>
-            <a:off x="4850892" y="4169664"/>
-            <a:ext cx="685800" cy="475488"/>
-          </a:xfrm>
-          <a:prstGeom prst="rect">
-            <a:avLst/>
-          </a:prstGeom>
-          <a:noFill/>
-          <a:ln/>
-        </p:spPr>
-        <p:txBody>
-          <a:bodyPr wrap="square" lIns="0" tIns="0" rIns="0" bIns="0" rtlCol="0" anchor="ctr"/>
-          <a:lstStyle/>
-          <a:p>
-            <a:pPr algn="ctr" indent="0" marL="0">
-              <a:buNone/>
-            </a:pPr>
-            <a:r>
-              <a:rPr lang="en-US" sz="900" b="1" dirty="0">
-                <a:solidFill>
-                  <a:srgbClr val="9D174D"/>
-                </a:solidFill>
-                <a:latin typeface="Trebuchet MS" pitchFamily="34" charset="0"/>
-                <a:ea typeface="Trebuchet MS" pitchFamily="34" charset="-122"/>
-                <a:cs typeface="Trebuchet MS" pitchFamily="34" charset="-120"/>
-              </a:rPr>
-              <a:t>t</a:t>
-            </a:r>
-            <a:endParaRPr lang="en-US" sz="900" dirty="0"/>
-          </a:p>
-        </p:txBody>
-      </p:sp>
-      <p:sp>
-        <p:nvSpPr>
-          <p:cNvPr id="42" name="Shape 40"/>
-          <p:cNvSpPr/>
-          <p:nvPr/>
-        </p:nvSpPr>
-        <p:spPr>
-          <a:xfrm>
-            <a:off x="6062472" y="4169664"/>
-            <a:ext cx="685800" cy="475488"/>
-          </a:xfrm>
-          <a:prstGeom prst="rect">
-            <a:avLst>
-              <a:gd name="adj" fmla="val 7692"/>
-            </a:avLst>
-          </a:prstGeom>
-          <a:solidFill>
-            <a:srgbClr val="FFFFFF"/>
-          </a:solidFill>
-          <a:ln w="12700">
-            <a:solidFill>
-              <a:srgbClr val="DB2777"/>
-            </a:solidFill>
-            <a:prstDash val="solid"/>
-          </a:ln>
-        </p:spPr>
-      </p:sp>
-      <p:sp>
-        <p:nvSpPr>
-          <p:cNvPr id="43" name="Text 41"/>
-          <p:cNvSpPr/>
-          <p:nvPr/>
-        </p:nvSpPr>
-        <p:spPr>
-          <a:xfrm>
-            <a:off x="6062472" y="4169664"/>
-            <a:ext cx="685800" cy="475488"/>
-          </a:xfrm>
-          <a:prstGeom prst="rect">
-            <a:avLst/>
-          </a:prstGeom>
-          <a:noFill/>
-          <a:ln/>
-        </p:spPr>
-        <p:txBody>
-          <a:bodyPr wrap="square" lIns="0" tIns="0" rIns="0" bIns="0" rtlCol="0" anchor="ctr"/>
-          <a:lstStyle/>
-          <a:p>
-            <a:pPr algn="ctr" indent="0" marL="0">
-              <a:buNone/>
-            </a:pPr>
-            <a:r>
-              <a:rPr lang="en-US" sz="900" b="1" dirty="0">
-                <a:solidFill>
-                  <a:srgbClr val="9D174D"/>
-                </a:solidFill>
-                <a:latin typeface="Trebuchet MS" pitchFamily="34" charset="0"/>
-                <a:ea typeface="Trebuchet MS" pitchFamily="34" charset="-122"/>
-                <a:cs typeface="Trebuchet MS" pitchFamily="34" charset="-120"/>
-              </a:rPr>
-              <a:t>er</a:t>
-            </a:r>
-            <a:endParaRPr lang="en-US" sz="900" dirty="0"/>
-          </a:p>
-        </p:txBody>
-      </p:sp>
-      <p:sp>
-        <p:nvSpPr>
-          <p:cNvPr id="44" name="Shape 42"/>
-          <p:cNvSpPr/>
-          <p:nvPr/>
-        </p:nvSpPr>
-        <p:spPr>
-          <a:xfrm>
-            <a:off x="7274052" y="4169664"/>
-            <a:ext cx="685800" cy="475488"/>
-          </a:xfrm>
-          <a:prstGeom prst="rect">
-            <a:avLst>
-              <a:gd name="adj" fmla="val 7692"/>
-            </a:avLst>
-          </a:prstGeom>
-          <a:solidFill>
-            <a:srgbClr val="FFFFFF"/>
-          </a:solidFill>
-          <a:ln w="12700">
-            <a:solidFill>
-              <a:srgbClr val="DB2777"/>
-            </a:solidFill>
-            <a:prstDash val="solid"/>
-          </a:ln>
-        </p:spPr>
-      </p:sp>
-      <p:sp>
-        <p:nvSpPr>
-          <p:cNvPr id="45" name="Text 43"/>
-          <p:cNvSpPr/>
-          <p:nvPr/>
-        </p:nvSpPr>
-        <p:spPr>
-          <a:xfrm>
-            <a:off x="7274052" y="4169664"/>
-            <a:ext cx="685800" cy="475488"/>
-          </a:xfrm>
-          <a:prstGeom prst="rect">
-            <a:avLst/>
-          </a:prstGeom>
-          <a:noFill/>
-          <a:ln/>
-        </p:spPr>
-        <p:txBody>
-          <a:bodyPr wrap="square" lIns="0" tIns="0" rIns="0" bIns="0" rtlCol="0" anchor="ctr"/>
-          <a:lstStyle/>
-          <a:p>
-            <a:pPr algn="ctr" indent="0" marL="0">
-              <a:buNone/>
-            </a:pPr>
-            <a:r>
-              <a:rPr lang="en-US" sz="900" b="1" dirty="0">
-                <a:solidFill>
-                  <a:srgbClr val="9D174D"/>
-                </a:solidFill>
-                <a:latin typeface="Trebuchet MS" pitchFamily="34" charset="0"/>
-                <a:ea typeface="Trebuchet MS" pitchFamily="34" charset="-122"/>
-                <a:cs typeface="Trebuchet MS" pitchFamily="34" charset="-120"/>
-              </a:rPr>
-              <a:t>s</a:t>
+              <a:t>ng</a:t>
             </a:r>
             <a:endParaRPr lang="en-US" sz="900" dirty="0"/>
           </a:p>
@@ -16273,7 +15937,7 @@
                 <a:ea typeface="Calibri" pitchFamily="34" charset="-122"/>
                 <a:cs typeface="Calibri" pitchFamily="34" charset="-120"/>
               </a:rPr>
-              <a:t>Word Labs  •  wordlabs.app  •  Root: 'meet' = to come together, join</a:t>
+              <a:t>Word Labs  •  wordlabs.app  •  Root: 'meet' = come together, encounter</a:t>
             </a:r>
             <a:endParaRPr lang="en-US" sz="800" dirty="0"/>
           </a:p>
@@ -16913,7 +16577,7 @@
                 <a:ea typeface="Calibri" pitchFamily="34" charset="-122"/>
                 <a:cs typeface="Calibri" pitchFamily="34" charset="-120"/>
               </a:rPr>
-              <a:t>Word Labs  •  wordlabs.app  •  Root: 'meet' = to come together, join</a:t>
+              <a:t>Word Labs  •  wordlabs.app  •  Root: 'meet' = come together, encounter</a:t>
             </a:r>
             <a:endParaRPr lang="en-US" sz="800" dirty="0"/>
           </a:p>
@@ -17025,7 +16689,7 @@
                 <a:ea typeface="Calibri" pitchFamily="34" charset="-122"/>
                 <a:cs typeface="Calibri" pitchFamily="34" charset="-120"/>
               </a:rPr>
-              <a:t>At the weekly </a:t>
+              <a:t>She will </a:t>
             </a:r>
             <a:pPr algn="l" indent="0" marL="0">
               <a:buNone/>
@@ -17042,7 +16706,7 @@
                 <a:ea typeface="Calibri" pitchFamily="34" charset="-122"/>
                 <a:cs typeface="Calibri" pitchFamily="34" charset="-120"/>
               </a:rPr>
-              <a:t>meeting</a:t>
+              <a:t>premeet</a:t>
             </a:r>
             <a:pPr algn="l" indent="0" marL="0">
               <a:buNone/>
@@ -17056,7 +16720,7 @@
                 <a:ea typeface="Calibri" pitchFamily="34" charset="-122"/>
                 <a:cs typeface="Calibri" pitchFamily="34" charset="-120"/>
               </a:rPr>
-              <a:t>, the students </a:t>
+              <a:t> with the team, but after </a:t>
             </a:r>
             <a:pPr algn="l" indent="0" marL="0">
               <a:buNone/>
@@ -17087,7 +16751,7 @@
                 <a:ea typeface="Calibri" pitchFamily="34" charset="-122"/>
                 <a:cs typeface="Calibri" pitchFamily="34" charset="-120"/>
               </a:rPr>
-              <a:t> their pen pals, and all the </a:t>
+              <a:t> with the coach, the </a:t>
             </a:r>
             <a:pPr algn="l" indent="0" marL="0">
               <a:buNone/>
@@ -17104,7 +16768,7 @@
                 <a:ea typeface="Calibri" pitchFamily="34" charset="-122"/>
                 <a:cs typeface="Calibri" pitchFamily="34" charset="-120"/>
               </a:rPr>
-              <a:t>meeters</a:t>
+              <a:t>meetings</a:t>
             </a:r>
             <a:pPr algn="l" indent="0" marL="0">
               <a:buNone/>
@@ -17118,7 +16782,7 @@
                 <a:ea typeface="Calibri" pitchFamily="34" charset="-122"/>
                 <a:cs typeface="Calibri" pitchFamily="34" charset="-120"/>
               </a:rPr>
-              <a:t> shared stories from home.</a:t>
+              <a:t> will be shorter.</a:t>
             </a:r>
             <a:endParaRPr lang="en-US" sz="1800" dirty="0"/>
           </a:p>
@@ -17273,7 +16937,7 @@
                 <a:ea typeface="Trebuchet MS" pitchFamily="34" charset="-122"/>
                 <a:cs typeface="Trebuchet MS" pitchFamily="34" charset="-120"/>
               </a:rPr>
-              <a:t>meeting</a:t>
+              <a:t>premeet</a:t>
             </a:r>
             <a:endParaRPr lang="en-US" sz="1400" dirty="0"/>
           </a:p>
@@ -17529,7 +17193,7 @@
                 <a:ea typeface="Trebuchet MS" pitchFamily="34" charset="-122"/>
                 <a:cs typeface="Trebuchet MS" pitchFamily="34" charset="-120"/>
               </a:rPr>
-              <a:t>meeters</a:t>
+              <a:t>meetings</a:t>
             </a:r>
             <a:endParaRPr lang="en-US" sz="1400" dirty="0"/>
           </a:p>
@@ -17860,7 +17524,7 @@
                 <a:ea typeface="Calibri" pitchFamily="34" charset="-122"/>
                 <a:cs typeface="Calibri" pitchFamily="34" charset="-120"/>
               </a:rPr>
-              <a:t>Word Labs  •  wordlabs.app  •  Root: 'meet' = to come together, join</a:t>
+              <a:t>Word Labs  •  wordlabs.app  •  Root: 'meet' = come together, encounter</a:t>
             </a:r>
             <a:endParaRPr lang="en-US" sz="800" dirty="0"/>
           </a:p>
@@ -17999,7 +17663,7 @@
                 <a:ea typeface="Trebuchet MS" pitchFamily="34" charset="-122"/>
                 <a:cs typeface="Trebuchet MS" pitchFamily="34" charset="-120"/>
               </a:rPr>
-              <a:t>meeting</a:t>
+              <a:t>premeet</a:t>
             </a:r>
             <a:endParaRPr lang="en-US" sz="2800" dirty="0"/>
           </a:p>
@@ -18687,7 +18351,7 @@
                 <a:ea typeface="Calibri" pitchFamily="34" charset="-122"/>
                 <a:cs typeface="Calibri" pitchFamily="34" charset="-120"/>
               </a:rPr>
-              <a:t>Word Labs  •  wordlabs.app  •  Root: 'meet' = to come together, join</a:t>
+              <a:t>Word Labs  •  wordlabs.app  •  Root: 'meet' = come together, encounter</a:t>
             </a:r>
             <a:endParaRPr lang="en-US" sz="800" dirty="0"/>
           </a:p>
@@ -18826,7 +18490,7 @@
                 <a:ea typeface="Trebuchet MS" pitchFamily="34" charset="-122"/>
                 <a:cs typeface="Trebuchet MS" pitchFamily="34" charset="-120"/>
               </a:rPr>
-              <a:t>meeting</a:t>
+              <a:t>premeet</a:t>
             </a:r>
             <a:endParaRPr lang="en-US" sz="2800" dirty="0"/>
           </a:p>
@@ -18915,11 +18579,11 @@
             </a:avLst>
           </a:prstGeom>
           <a:solidFill>
-            <a:srgbClr val="CCFBF1"/>
+            <a:srgbClr val="DDD6FE"/>
           </a:solidFill>
           <a:ln w="19050">
             <a:solidFill>
-              <a:srgbClr val="0D9488"/>
+              <a:srgbClr val="7C3AED"/>
             </a:solidFill>
             <a:prstDash val="solid"/>
           </a:ln>
@@ -18959,13 +18623,13 @@
             <a:r>
               <a:rPr lang="en-US" sz="1300" b="1" dirty="0">
                 <a:solidFill>
-                  <a:srgbClr val="0F766E"/>
+                  <a:srgbClr val="4C1D95"/>
                 </a:solidFill>
                 <a:latin typeface="Trebuchet MS" pitchFamily="34" charset="0"/>
                 <a:ea typeface="Trebuchet MS" pitchFamily="34" charset="-122"/>
                 <a:cs typeface="Trebuchet MS" pitchFamily="34" charset="-120"/>
               </a:rPr>
-              <a:t>meet</a:t>
+              <a:t>pre</a:t>
             </a:r>
             <a:endParaRPr lang="en-US" sz="1300" dirty="0"/>
           </a:p>
@@ -19004,7 +18668,7 @@
                 <a:ea typeface="Calibri" pitchFamily="34" charset="-122"/>
                 <a:cs typeface="Calibri" pitchFamily="34" charset="-120"/>
               </a:rPr>
-              <a:t>to come together</a:t>
+              <a:t>before</a:t>
             </a:r>
             <a:endParaRPr lang="en-US" sz="850" dirty="0"/>
           </a:p>
@@ -19027,11 +18691,11 @@
             </a:avLst>
           </a:prstGeom>
           <a:solidFill>
-            <a:srgbClr val="FCE7F3"/>
+            <a:srgbClr val="CCFBF1"/>
           </a:solidFill>
           <a:ln w="19050">
             <a:solidFill>
-              <a:srgbClr val="DB2777"/>
+              <a:srgbClr val="0D9488"/>
             </a:solidFill>
             <a:prstDash val="solid"/>
           </a:ln>
@@ -19071,13 +18735,13 @@
             <a:r>
               <a:rPr lang="en-US" sz="1300" b="1" dirty="0">
                 <a:solidFill>
-                  <a:srgbClr val="9D174D"/>
+                  <a:srgbClr val="0F766E"/>
                 </a:solidFill>
                 <a:latin typeface="Trebuchet MS" pitchFamily="34" charset="0"/>
                 <a:ea typeface="Trebuchet MS" pitchFamily="34" charset="-122"/>
                 <a:cs typeface="Trebuchet MS" pitchFamily="34" charset="-120"/>
               </a:rPr>
-              <a:t>ing</a:t>
+              <a:t>meet</a:t>
             </a:r>
             <a:endParaRPr lang="en-US" sz="1300" dirty="0"/>
           </a:p>
@@ -19116,7 +18780,7 @@
                 <a:ea typeface="Calibri" pitchFamily="34" charset="-122"/>
                 <a:cs typeface="Calibri" pitchFamily="34" charset="-120"/>
               </a:rPr>
-              <a:t>action in progress</a:t>
+              <a:t>come together</a:t>
             </a:r>
             <a:endParaRPr lang="en-US" sz="850" dirty="0"/>
           </a:p>
@@ -19672,7 +19336,7 @@
                 <a:ea typeface="Calibri" pitchFamily="34" charset="-122"/>
                 <a:cs typeface="Calibri" pitchFamily="34" charset="-120"/>
               </a:rPr>
-              <a:t>Word Labs  •  wordlabs.app  •  Root: 'meet' = to come together, join</a:t>
+              <a:t>Word Labs  •  wordlabs.app  •  Root: 'meet' = come together, encounter</a:t>
             </a:r>
             <a:endParaRPr lang="en-US" sz="800" dirty="0"/>
           </a:p>
@@ -19811,7 +19475,7 @@
                 <a:ea typeface="Trebuchet MS" pitchFamily="34" charset="-122"/>
                 <a:cs typeface="Trebuchet MS" pitchFamily="34" charset="-120"/>
               </a:rPr>
-              <a:t>meeting</a:t>
+              <a:t>premeet</a:t>
             </a:r>
             <a:endParaRPr lang="en-US" sz="2800" dirty="0"/>
           </a:p>
@@ -19900,11 +19564,11 @@
             </a:avLst>
           </a:prstGeom>
           <a:solidFill>
-            <a:srgbClr val="CCFBF1"/>
+            <a:srgbClr val="DDD6FE"/>
           </a:solidFill>
           <a:ln w="19050">
             <a:solidFill>
-              <a:srgbClr val="0D9488"/>
+              <a:srgbClr val="7C3AED"/>
             </a:solidFill>
             <a:prstDash val="solid"/>
           </a:ln>
@@ -19944,13 +19608,13 @@
             <a:r>
               <a:rPr lang="en-US" sz="1300" b="1" dirty="0">
                 <a:solidFill>
-                  <a:srgbClr val="0F766E"/>
+                  <a:srgbClr val="4C1D95"/>
                 </a:solidFill>
                 <a:latin typeface="Trebuchet MS" pitchFamily="34" charset="0"/>
                 <a:ea typeface="Trebuchet MS" pitchFamily="34" charset="-122"/>
                 <a:cs typeface="Trebuchet MS" pitchFamily="34" charset="-120"/>
               </a:rPr>
-              <a:t>meet</a:t>
+              <a:t>pre</a:t>
             </a:r>
             <a:endParaRPr lang="en-US" sz="1300" dirty="0"/>
           </a:p>
@@ -19989,7 +19653,7 @@
                 <a:ea typeface="Calibri" pitchFamily="34" charset="-122"/>
                 <a:cs typeface="Calibri" pitchFamily="34" charset="-120"/>
               </a:rPr>
-              <a:t>to come together</a:t>
+              <a:t>before</a:t>
             </a:r>
             <a:endParaRPr lang="en-US" sz="850" dirty="0"/>
           </a:p>
@@ -20012,11 +19676,11 @@
             </a:avLst>
           </a:prstGeom>
           <a:solidFill>
-            <a:srgbClr val="FCE7F3"/>
+            <a:srgbClr val="CCFBF1"/>
           </a:solidFill>
           <a:ln w="19050">
             <a:solidFill>
-              <a:srgbClr val="DB2777"/>
+              <a:srgbClr val="0D9488"/>
             </a:solidFill>
             <a:prstDash val="solid"/>
           </a:ln>
@@ -20056,13 +19720,13 @@
             <a:r>
               <a:rPr lang="en-US" sz="1300" b="1" dirty="0">
                 <a:solidFill>
-                  <a:srgbClr val="9D174D"/>
+                  <a:srgbClr val="0F766E"/>
                 </a:solidFill>
                 <a:latin typeface="Trebuchet MS" pitchFamily="34" charset="0"/>
                 <a:ea typeface="Trebuchet MS" pitchFamily="34" charset="-122"/>
                 <a:cs typeface="Trebuchet MS" pitchFamily="34" charset="-120"/>
               </a:rPr>
-              <a:t>ing</a:t>
+              <a:t>meet</a:t>
             </a:r>
             <a:endParaRPr lang="en-US" sz="1300" dirty="0"/>
           </a:p>
@@ -20101,7 +19765,7 @@
                 <a:ea typeface="Calibri" pitchFamily="34" charset="-122"/>
                 <a:cs typeface="Calibri" pitchFamily="34" charset="-120"/>
               </a:rPr>
-              <a:t>action in progress</a:t>
+              <a:t>come together</a:t>
             </a:r>
             <a:endParaRPr lang="en-US" sz="850" dirty="0"/>
           </a:p>
@@ -20260,7 +19924,7 @@
                 <a:ea typeface="Trebuchet MS" pitchFamily="34" charset="-122"/>
                 <a:cs typeface="Trebuchet MS" pitchFamily="34" charset="-120"/>
               </a:rPr>
-              <a:t>meet</a:t>
+              <a:t>pre</a:t>
             </a:r>
             <a:endParaRPr lang="en-US" sz="1400" dirty="0"/>
           </a:p>
@@ -20365,7 +20029,7 @@
                 <a:ea typeface="Trebuchet MS" pitchFamily="34" charset="-122"/>
                 <a:cs typeface="Trebuchet MS" pitchFamily="34" charset="-120"/>
               </a:rPr>
-              <a:t>ing</a:t>
+              <a:t>meet</a:t>
             </a:r>
             <a:endParaRPr lang="en-US" sz="1400" dirty="0"/>
           </a:p>
@@ -20789,7 +20453,7 @@
                 <a:ea typeface="Calibri" pitchFamily="34" charset="-122"/>
                 <a:cs typeface="Calibri" pitchFamily="34" charset="-120"/>
               </a:rPr>
-              <a:t>Word Labs  •  wordlabs.app  •  Root: 'meet' = to come together, join</a:t>
+              <a:t>Word Labs  •  wordlabs.app  •  Root: 'meet' = come together, encounter</a:t>
             </a:r>
             <a:endParaRPr lang="en-US" sz="800" dirty="0"/>
           </a:p>
@@ -20928,7 +20592,7 @@
                 <a:ea typeface="Trebuchet MS" pitchFamily="34" charset="-122"/>
                 <a:cs typeface="Trebuchet MS" pitchFamily="34" charset="-120"/>
               </a:rPr>
-              <a:t>meeting</a:t>
+              <a:t>premeet</a:t>
             </a:r>
             <a:endParaRPr lang="en-US" sz="2800" dirty="0"/>
           </a:p>
@@ -21017,11 +20681,11 @@
             </a:avLst>
           </a:prstGeom>
           <a:solidFill>
-            <a:srgbClr val="CCFBF1"/>
+            <a:srgbClr val="DDD6FE"/>
           </a:solidFill>
           <a:ln w="19050">
             <a:solidFill>
-              <a:srgbClr val="0D9488"/>
+              <a:srgbClr val="7C3AED"/>
             </a:solidFill>
             <a:prstDash val="solid"/>
           </a:ln>
@@ -21061,13 +20725,13 @@
             <a:r>
               <a:rPr lang="en-US" sz="1300" b="1" dirty="0">
                 <a:solidFill>
-                  <a:srgbClr val="0F766E"/>
+                  <a:srgbClr val="4C1D95"/>
                 </a:solidFill>
                 <a:latin typeface="Trebuchet MS" pitchFamily="34" charset="0"/>
                 <a:ea typeface="Trebuchet MS" pitchFamily="34" charset="-122"/>
                 <a:cs typeface="Trebuchet MS" pitchFamily="34" charset="-120"/>
               </a:rPr>
-              <a:t>meet</a:t>
+              <a:t>pre</a:t>
             </a:r>
             <a:endParaRPr lang="en-US" sz="1300" dirty="0"/>
           </a:p>
@@ -21106,7 +20770,7 @@
                 <a:ea typeface="Calibri" pitchFamily="34" charset="-122"/>
                 <a:cs typeface="Calibri" pitchFamily="34" charset="-120"/>
               </a:rPr>
-              <a:t>to come together</a:t>
+              <a:t>before</a:t>
             </a:r>
             <a:endParaRPr lang="en-US" sz="850" dirty="0"/>
           </a:p>
@@ -21129,11 +20793,11 @@
             </a:avLst>
           </a:prstGeom>
           <a:solidFill>
-            <a:srgbClr val="FCE7F3"/>
+            <a:srgbClr val="CCFBF1"/>
           </a:solidFill>
           <a:ln w="19050">
             <a:solidFill>
-              <a:srgbClr val="DB2777"/>
+              <a:srgbClr val="0D9488"/>
             </a:solidFill>
             <a:prstDash val="solid"/>
           </a:ln>
@@ -21173,13 +20837,13 @@
             <a:r>
               <a:rPr lang="en-US" sz="1300" b="1" dirty="0">
                 <a:solidFill>
-                  <a:srgbClr val="9D174D"/>
+                  <a:srgbClr val="0F766E"/>
                 </a:solidFill>
                 <a:latin typeface="Trebuchet MS" pitchFamily="34" charset="0"/>
                 <a:ea typeface="Trebuchet MS" pitchFamily="34" charset="-122"/>
                 <a:cs typeface="Trebuchet MS" pitchFamily="34" charset="-120"/>
               </a:rPr>
-              <a:t>ing</a:t>
+              <a:t>meet</a:t>
             </a:r>
             <a:endParaRPr lang="en-US" sz="1300" dirty="0"/>
           </a:p>
@@ -21218,7 +20882,7 @@
                 <a:ea typeface="Calibri" pitchFamily="34" charset="-122"/>
                 <a:cs typeface="Calibri" pitchFamily="34" charset="-120"/>
               </a:rPr>
-              <a:t>action in progress</a:t>
+              <a:t>come together</a:t>
             </a:r>
             <a:endParaRPr lang="en-US" sz="850" dirty="0"/>
           </a:p>
@@ -21377,7 +21041,7 @@
                 <a:ea typeface="Trebuchet MS" pitchFamily="34" charset="-122"/>
                 <a:cs typeface="Trebuchet MS" pitchFamily="34" charset="-120"/>
               </a:rPr>
-              <a:t>meet</a:t>
+              <a:t>pre</a:t>
             </a:r>
             <a:endParaRPr lang="en-US" sz="1400" dirty="0"/>
           </a:p>
@@ -21482,7 +21146,7 @@
                 <a:ea typeface="Trebuchet MS" pitchFamily="34" charset="-122"/>
                 <a:cs typeface="Trebuchet MS" pitchFamily="34" charset="-120"/>
               </a:rPr>
-              <a:t>ing</a:t>
+              <a:t>meet</a:t>
             </a:r>
             <a:endParaRPr lang="en-US" sz="1400" dirty="0"/>
           </a:p>
@@ -21589,7 +21253,7 @@
         </p:nvSpPr>
         <p:spPr>
           <a:xfrm>
-            <a:off x="2427732" y="4169664"/>
+            <a:off x="2254649" y="4169664"/>
             <a:ext cx="685800" cy="475488"/>
           </a:xfrm>
           <a:prstGeom prst="rect">
@@ -21616,7 +21280,7 @@
         </p:nvSpPr>
         <p:spPr>
           <a:xfrm>
-            <a:off x="2427732" y="4169664"/>
+            <a:off x="2254649" y="4169664"/>
             <a:ext cx="685800" cy="475488"/>
           </a:xfrm>
           <a:prstGeom prst="rect">
@@ -21641,7 +21305,7 @@
                 <a:ea typeface="Trebuchet MS" pitchFamily="34" charset="-122"/>
                 <a:cs typeface="Trebuchet MS" pitchFamily="34" charset="-120"/>
               </a:rPr>
-              <a:t>m</a:t>
+              <a:t>p</a:t>
             </a:r>
             <a:endParaRPr lang="en-US" sz="900" dirty="0"/>
           </a:p>
@@ -21655,7 +21319,7 @@
         </p:nvSpPr>
         <p:spPr>
           <a:xfrm>
-            <a:off x="3639312" y="4169664"/>
+            <a:off x="3293146" y="4169664"/>
             <a:ext cx="685800" cy="475488"/>
           </a:xfrm>
           <a:prstGeom prst="rect">
@@ -21682,7 +21346,7 @@
         </p:nvSpPr>
         <p:spPr>
           <a:xfrm>
-            <a:off x="3639312" y="4169664"/>
+            <a:off x="3293146" y="4169664"/>
             <a:ext cx="685800" cy="475488"/>
           </a:xfrm>
           <a:prstGeom prst="rect">
@@ -21707,7 +21371,7 @@
                 <a:ea typeface="Trebuchet MS" pitchFamily="34" charset="-122"/>
                 <a:cs typeface="Trebuchet MS" pitchFamily="34" charset="-120"/>
               </a:rPr>
-              <a:t>ee</a:t>
+              <a:t>r</a:t>
             </a:r>
             <a:endParaRPr lang="en-US" sz="900" dirty="0"/>
           </a:p>
@@ -21721,7 +21385,7 @@
         </p:nvSpPr>
         <p:spPr>
           <a:xfrm>
-            <a:off x="4850892" y="4169664"/>
+            <a:off x="4331643" y="4169664"/>
             <a:ext cx="685800" cy="475488"/>
           </a:xfrm>
           <a:prstGeom prst="rect">
@@ -21748,7 +21412,7 @@
         </p:nvSpPr>
         <p:spPr>
           <a:xfrm>
-            <a:off x="4850892" y="4169664"/>
+            <a:off x="4331643" y="4169664"/>
             <a:ext cx="685800" cy="475488"/>
           </a:xfrm>
           <a:prstGeom prst="rect">
@@ -21773,7 +21437,7 @@
                 <a:ea typeface="Trebuchet MS" pitchFamily="34" charset="-122"/>
                 <a:cs typeface="Trebuchet MS" pitchFamily="34" charset="-120"/>
               </a:rPr>
-              <a:t>t</a:t>
+              <a:t>e</a:t>
             </a:r>
             <a:endParaRPr lang="en-US" sz="900" dirty="0"/>
           </a:p>
@@ -21787,7 +21451,7 @@
         </p:nvSpPr>
         <p:spPr>
           <a:xfrm>
-            <a:off x="6062472" y="4169664"/>
+            <a:off x="5370141" y="4169664"/>
             <a:ext cx="685800" cy="475488"/>
           </a:xfrm>
           <a:prstGeom prst="rect">
@@ -21814,7 +21478,7 @@
         </p:nvSpPr>
         <p:spPr>
           <a:xfrm>
-            <a:off x="6062472" y="4169664"/>
+            <a:off x="5370141" y="4169664"/>
             <a:ext cx="685800" cy="475488"/>
           </a:xfrm>
           <a:prstGeom prst="rect">
@@ -21839,7 +21503,7 @@
                 <a:ea typeface="Trebuchet MS" pitchFamily="34" charset="-122"/>
                 <a:cs typeface="Trebuchet MS" pitchFamily="34" charset="-120"/>
               </a:rPr>
-              <a:t>i</a:t>
+              <a:t>m</a:t>
             </a:r>
             <a:endParaRPr lang="en-US" sz="900" dirty="0"/>
           </a:p>
@@ -21853,7 +21517,7 @@
         </p:nvSpPr>
         <p:spPr>
           <a:xfrm>
-            <a:off x="7274052" y="4169664"/>
+            <a:off x="6408638" y="4169664"/>
             <a:ext cx="685800" cy="475488"/>
           </a:xfrm>
           <a:prstGeom prst="rect">
@@ -21880,7 +21544,7 @@
         </p:nvSpPr>
         <p:spPr>
           <a:xfrm>
-            <a:off x="7274052" y="4169664"/>
+            <a:off x="6408638" y="4169664"/>
             <a:ext cx="685800" cy="475488"/>
           </a:xfrm>
           <a:prstGeom prst="rect">
@@ -21905,7 +21569,73 @@
                 <a:ea typeface="Trebuchet MS" pitchFamily="34" charset="-122"/>
                 <a:cs typeface="Trebuchet MS" pitchFamily="34" charset="-120"/>
               </a:rPr>
-              <a:t>ng</a:t>
+              <a:t>ee</a:t>
+            </a:r>
+            <a:endParaRPr lang="en-US" sz="900" dirty="0"/>
+          </a:p>
+        </p:txBody>
+      </p:sp>
+      <p:sp>
+        <p:nvSpPr>
+          <p:cNvPr id="43" name="Shape 41"/>
+          <p:cNvSpPr/>
+          <p:nvPr/>
+        </p:nvSpPr>
+        <p:spPr>
+          <a:xfrm>
+            <a:off x="7447135" y="4169664"/>
+            <a:ext cx="685800" cy="475488"/>
+          </a:xfrm>
+          <a:prstGeom prst="rect">
+            <a:avLst>
+              <a:gd name="adj" fmla="val 7692"/>
+            </a:avLst>
+          </a:prstGeom>
+          <a:solidFill>
+            <a:srgbClr val="FFFFFF"/>
+          </a:solidFill>
+          <a:ln w="12700">
+            <a:solidFill>
+              <a:srgbClr val="DB2777"/>
+            </a:solidFill>
+            <a:prstDash val="solid"/>
+          </a:ln>
+        </p:spPr>
+      </p:sp>
+      <p:sp>
+        <p:nvSpPr>
+          <p:cNvPr id="44" name="Text 42"/>
+          <p:cNvSpPr/>
+          <p:nvPr/>
+        </p:nvSpPr>
+        <p:spPr>
+          <a:xfrm>
+            <a:off x="7447135" y="4169664"/>
+            <a:ext cx="685800" cy="475488"/>
+          </a:xfrm>
+          <a:prstGeom prst="rect">
+            <a:avLst/>
+          </a:prstGeom>
+          <a:noFill/>
+          <a:ln/>
+        </p:spPr>
+        <p:txBody>
+          <a:bodyPr wrap="square" lIns="0" tIns="0" rIns="0" bIns="0" rtlCol="0" anchor="ctr"/>
+          <a:lstStyle/>
+          <a:p>
+            <a:pPr algn="ctr" indent="0" marL="0">
+              <a:buNone/>
+            </a:pPr>
+            <a:r>
+              <a:rPr lang="en-US" sz="900" b="1" dirty="0">
+                <a:solidFill>
+                  <a:srgbClr val="9D174D"/>
+                </a:solidFill>
+                <a:latin typeface="Trebuchet MS" pitchFamily="34" charset="0"/>
+                <a:ea typeface="Trebuchet MS" pitchFamily="34" charset="-122"/>
+                <a:cs typeface="Trebuchet MS" pitchFamily="34" charset="-120"/>
+              </a:rPr>
+              <a:t>t</a:t>
             </a:r>
             <a:endParaRPr lang="en-US" sz="900" dirty="0"/>
           </a:p>
@@ -22197,7 +21927,7 @@
                 <a:ea typeface="Calibri" pitchFamily="34" charset="-122"/>
                 <a:cs typeface="Calibri" pitchFamily="34" charset="-120"/>
               </a:rPr>
-              <a:t>Word Labs  •  wordlabs.app  •  Root: 'meet' = to come together, join</a:t>
+              <a:t>Word Labs  •  wordlabs.app  •  Root: 'meet' = come together, encounter</a:t>
             </a:r>
             <a:endParaRPr lang="en-US" sz="800" dirty="0"/>
           </a:p>
@@ -23024,7 +22754,7 @@
                 <a:ea typeface="Calibri" pitchFamily="34" charset="-122"/>
                 <a:cs typeface="Calibri" pitchFamily="34" charset="-120"/>
               </a:rPr>
-              <a:t>Word Labs  •  wordlabs.app  •  Root: 'meet' = to come together, join</a:t>
+              <a:t>Word Labs  •  wordlabs.app  •  Root: 'meet' = come together, encounter</a:t>
             </a:r>
             <a:endParaRPr lang="en-US" sz="800" dirty="0"/>
           </a:p>
@@ -23453,7 +23183,7 @@
                 <a:ea typeface="Calibri" pitchFamily="34" charset="-122"/>
                 <a:cs typeface="Calibri" pitchFamily="34" charset="-120"/>
               </a:rPr>
-              <a:t>to come together</a:t>
+              <a:t>come together</a:t>
             </a:r>
             <a:endParaRPr lang="en-US" sz="850" dirty="0"/>
           </a:p>
@@ -24009,7 +23739,7 @@
                 <a:ea typeface="Calibri" pitchFamily="34" charset="-122"/>
                 <a:cs typeface="Calibri" pitchFamily="34" charset="-120"/>
               </a:rPr>
-              <a:t>Word Labs  •  wordlabs.app  •  Root: 'meet' = to come together, join</a:t>
+              <a:t>Word Labs  •  wordlabs.app  •  Root: 'meet' = come together, encounter</a:t>
             </a:r>
             <a:endParaRPr lang="en-US" sz="800" dirty="0"/>
           </a:p>
@@ -24082,7 +23812,7 @@
                 <a:ea typeface="Trebuchet MS" pitchFamily="34" charset="-122"/>
                 <a:cs typeface="Trebuchet MS" pitchFamily="34" charset="-120"/>
               </a:rPr>
-              <a:t>We are learning that the root 'meet' means 'to come together, join'.</a:t>
+              <a:t>We are learning that the root 'meet' means 'come together, encounter'.</a:t>
             </a:r>
             <a:endParaRPr lang="en-US" sz="2000" dirty="0"/>
           </a:p>
@@ -24728,7 +24458,7 @@
                 <a:ea typeface="Calibri" pitchFamily="34" charset="-122"/>
                 <a:cs typeface="Calibri" pitchFamily="34" charset="-120"/>
               </a:rPr>
-              <a:t>Word Labs  •  wordlabs.app  •  Root: 'meet' = to come together, join</a:t>
+              <a:t>Word Labs  •  wordlabs.app  •  Root: 'meet' = come together, encounter</a:t>
             </a:r>
             <a:endParaRPr lang="en-US" sz="800" dirty="0"/>
           </a:p>
@@ -25157,7 +24887,7 @@
                 <a:ea typeface="Calibri" pitchFamily="34" charset="-122"/>
                 <a:cs typeface="Calibri" pitchFamily="34" charset="-120"/>
               </a:rPr>
-              <a:t>to come together</a:t>
+              <a:t>come together</a:t>
             </a:r>
             <a:endParaRPr lang="en-US" sz="850" dirty="0"/>
           </a:p>
@@ -25845,7 +25575,7 @@
                 <a:ea typeface="Calibri" pitchFamily="34" charset="-122"/>
                 <a:cs typeface="Calibri" pitchFamily="34" charset="-120"/>
               </a:rPr>
-              <a:t>Word Labs  •  wordlabs.app  •  Root: 'meet' = to come together, join</a:t>
+              <a:t>Word Labs  •  wordlabs.app  •  Root: 'meet' = come together, encounter</a:t>
             </a:r>
             <a:endParaRPr lang="en-US" sz="800" dirty="0"/>
           </a:p>
@@ -26274,7 +26004,7 @@
                 <a:ea typeface="Calibri" pitchFamily="34" charset="-122"/>
                 <a:cs typeface="Calibri" pitchFamily="34" charset="-120"/>
               </a:rPr>
-              <a:t>to come together</a:t>
+              <a:t>come together</a:t>
             </a:r>
             <a:endParaRPr lang="en-US" sz="850" dirty="0"/>
           </a:p>
@@ -27253,7 +26983,7 @@
                 <a:ea typeface="Calibri" pitchFamily="34" charset="-122"/>
                 <a:cs typeface="Calibri" pitchFamily="34" charset="-120"/>
               </a:rPr>
-              <a:t>Word Labs  •  wordlabs.app  •  Root: 'meet' = to come together, join</a:t>
+              <a:t>Word Labs  •  wordlabs.app  •  Root: 'meet' = come together, encounter</a:t>
             </a:r>
             <a:endParaRPr lang="en-US" sz="800" dirty="0"/>
           </a:p>
@@ -27392,7 +27122,7 @@
                 <a:ea typeface="Trebuchet MS" pitchFamily="34" charset="-122"/>
                 <a:cs typeface="Trebuchet MS" pitchFamily="34" charset="-120"/>
               </a:rPr>
-              <a:t>meeters</a:t>
+              <a:t>meetings</a:t>
             </a:r>
             <a:endParaRPr lang="en-US" sz="2800" dirty="0"/>
           </a:p>
@@ -28080,7 +27810,7 @@
                 <a:ea typeface="Calibri" pitchFamily="34" charset="-122"/>
                 <a:cs typeface="Calibri" pitchFamily="34" charset="-120"/>
               </a:rPr>
-              <a:t>Word Labs  •  wordlabs.app  •  Root: 'meet' = to come together, join</a:t>
+              <a:t>Word Labs  •  wordlabs.app  •  Root: 'meet' = come together, encounter</a:t>
             </a:r>
             <a:endParaRPr lang="en-US" sz="800" dirty="0"/>
           </a:p>
@@ -28219,7 +27949,7 @@
                 <a:ea typeface="Trebuchet MS" pitchFamily="34" charset="-122"/>
                 <a:cs typeface="Trebuchet MS" pitchFamily="34" charset="-120"/>
               </a:rPr>
-              <a:t>meeters</a:t>
+              <a:t>meetings</a:t>
             </a:r>
             <a:endParaRPr lang="en-US" sz="2800" dirty="0"/>
           </a:p>
@@ -28397,7 +28127,7 @@
                 <a:ea typeface="Calibri" pitchFamily="34" charset="-122"/>
                 <a:cs typeface="Calibri" pitchFamily="34" charset="-120"/>
               </a:rPr>
-              <a:t>to come together</a:t>
+              <a:t>come together</a:t>
             </a:r>
             <a:endParaRPr lang="en-US" sz="850" dirty="0"/>
           </a:p>
@@ -28470,7 +28200,7 @@
                 <a:ea typeface="Trebuchet MS" pitchFamily="34" charset="-122"/>
                 <a:cs typeface="Trebuchet MS" pitchFamily="34" charset="-120"/>
               </a:rPr>
-              <a:t>er</a:t>
+              <a:t>ing</a:t>
             </a:r>
             <a:endParaRPr lang="en-US" sz="1300" dirty="0"/>
           </a:p>
@@ -28509,7 +28239,7 @@
                 <a:ea typeface="Calibri" pitchFamily="34" charset="-122"/>
                 <a:cs typeface="Calibri" pitchFamily="34" charset="-120"/>
               </a:rPr>
-              <a:t>one who does</a:t>
+              <a:t>action or process</a:t>
             </a:r>
             <a:endParaRPr lang="en-US" sz="850" dirty="0"/>
           </a:p>
@@ -29177,7 +28907,7 @@
                 <a:ea typeface="Calibri" pitchFamily="34" charset="-122"/>
                 <a:cs typeface="Calibri" pitchFamily="34" charset="-120"/>
               </a:rPr>
-              <a:t>Word Labs  •  wordlabs.app  •  Root: 'meet' = to come together, join</a:t>
+              <a:t>Word Labs  •  wordlabs.app  •  Root: 'meet' = come together, encounter</a:t>
             </a:r>
             <a:endParaRPr lang="en-US" sz="800" dirty="0"/>
           </a:p>
@@ -29316,7 +29046,7 @@
                 <a:ea typeface="Trebuchet MS" pitchFamily="34" charset="-122"/>
                 <a:cs typeface="Trebuchet MS" pitchFamily="34" charset="-120"/>
               </a:rPr>
-              <a:t>meeters</a:t>
+              <a:t>meetings</a:t>
             </a:r>
             <a:endParaRPr lang="en-US" sz="2800" dirty="0"/>
           </a:p>
@@ -29494,7 +29224,7 @@
                 <a:ea typeface="Calibri" pitchFamily="34" charset="-122"/>
                 <a:cs typeface="Calibri" pitchFamily="34" charset="-120"/>
               </a:rPr>
-              <a:t>to come together</a:t>
+              <a:t>come together</a:t>
             </a:r>
             <a:endParaRPr lang="en-US" sz="850" dirty="0"/>
           </a:p>
@@ -29567,7 +29297,7 @@
                 <a:ea typeface="Trebuchet MS" pitchFamily="34" charset="-122"/>
                 <a:cs typeface="Trebuchet MS" pitchFamily="34" charset="-120"/>
               </a:rPr>
-              <a:t>er</a:t>
+              <a:t>ing</a:t>
             </a:r>
             <a:endParaRPr lang="en-US" sz="1300" dirty="0"/>
           </a:p>
@@ -29606,7 +29336,7 @@
                 <a:ea typeface="Calibri" pitchFamily="34" charset="-122"/>
                 <a:cs typeface="Calibri" pitchFamily="34" charset="-120"/>
               </a:rPr>
-              <a:t>one who does</a:t>
+              <a:t>action or process</a:t>
             </a:r>
             <a:endParaRPr lang="en-US" sz="850" dirty="0"/>
           </a:p>
@@ -29982,7 +29712,7 @@
                 <a:ea typeface="Trebuchet MS" pitchFamily="34" charset="-122"/>
                 <a:cs typeface="Trebuchet MS" pitchFamily="34" charset="-120"/>
               </a:rPr>
-              <a:t>ers</a:t>
+              <a:t>ings</a:t>
             </a:r>
             <a:endParaRPr lang="en-US" sz="1400" dirty="0"/>
           </a:p>
@@ -30406,7 +30136,7 @@
                 <a:ea typeface="Calibri" pitchFamily="34" charset="-122"/>
                 <a:cs typeface="Calibri" pitchFamily="34" charset="-120"/>
               </a:rPr>
-              <a:t>Word Labs  •  wordlabs.app  •  Root: 'meet' = to come together, join</a:t>
+              <a:t>Word Labs  •  wordlabs.app  •  Root: 'meet' = come together, encounter</a:t>
             </a:r>
             <a:endParaRPr lang="en-US" sz="800" dirty="0"/>
           </a:p>
@@ -30545,7 +30275,7 @@
                 <a:ea typeface="Trebuchet MS" pitchFamily="34" charset="-122"/>
                 <a:cs typeface="Trebuchet MS" pitchFamily="34" charset="-120"/>
               </a:rPr>
-              <a:t>meeters</a:t>
+              <a:t>meetings</a:t>
             </a:r>
             <a:endParaRPr lang="en-US" sz="2800" dirty="0"/>
           </a:p>
@@ -30723,7 +30453,7 @@
                 <a:ea typeface="Calibri" pitchFamily="34" charset="-122"/>
                 <a:cs typeface="Calibri" pitchFamily="34" charset="-120"/>
               </a:rPr>
-              <a:t>to come together</a:t>
+              <a:t>come together</a:t>
             </a:r>
             <a:endParaRPr lang="en-US" sz="850" dirty="0"/>
           </a:p>
@@ -30796,7 +30526,7 @@
                 <a:ea typeface="Trebuchet MS" pitchFamily="34" charset="-122"/>
                 <a:cs typeface="Trebuchet MS" pitchFamily="34" charset="-120"/>
               </a:rPr>
-              <a:t>er</a:t>
+              <a:t>ing</a:t>
             </a:r>
             <a:endParaRPr lang="en-US" sz="1300" dirty="0"/>
           </a:p>
@@ -30835,7 +30565,7 @@
                 <a:ea typeface="Calibri" pitchFamily="34" charset="-122"/>
                 <a:cs typeface="Calibri" pitchFamily="34" charset="-120"/>
               </a:rPr>
-              <a:t>one who does</a:t>
+              <a:t>action or process</a:t>
             </a:r>
             <a:endParaRPr lang="en-US" sz="850" dirty="0"/>
           </a:p>
@@ -31211,7 +30941,7 @@
                 <a:ea typeface="Trebuchet MS" pitchFamily="34" charset="-122"/>
                 <a:cs typeface="Trebuchet MS" pitchFamily="34" charset="-120"/>
               </a:rPr>
-              <a:t>ers</a:t>
+              <a:t>ings</a:t>
             </a:r>
             <a:endParaRPr lang="en-US" sz="1400" dirty="0"/>
           </a:p>
@@ -31318,7 +31048,7 @@
         </p:nvSpPr>
         <p:spPr>
           <a:xfrm>
-            <a:off x="2427732" y="4169664"/>
+            <a:off x="2254649" y="4169664"/>
             <a:ext cx="685800" cy="475488"/>
           </a:xfrm>
           <a:prstGeom prst="rect">
@@ -31345,7 +31075,7 @@
         </p:nvSpPr>
         <p:spPr>
           <a:xfrm>
-            <a:off x="2427732" y="4169664"/>
+            <a:off x="2254649" y="4169664"/>
             <a:ext cx="685800" cy="475488"/>
           </a:xfrm>
           <a:prstGeom prst="rect">
@@ -31384,7 +31114,7 @@
         </p:nvSpPr>
         <p:spPr>
           <a:xfrm>
-            <a:off x="3639312" y="4169664"/>
+            <a:off x="3293146" y="4169664"/>
             <a:ext cx="685800" cy="475488"/>
           </a:xfrm>
           <a:prstGeom prst="rect">
@@ -31411,7 +31141,7 @@
         </p:nvSpPr>
         <p:spPr>
           <a:xfrm>
-            <a:off x="3639312" y="4169664"/>
+            <a:off x="3293146" y="4169664"/>
             <a:ext cx="685800" cy="475488"/>
           </a:xfrm>
           <a:prstGeom prst="rect">
@@ -31450,7 +31180,7 @@
         </p:nvSpPr>
         <p:spPr>
           <a:xfrm>
-            <a:off x="4850892" y="4169664"/>
+            <a:off x="4331643" y="4169664"/>
             <a:ext cx="685800" cy="475488"/>
           </a:xfrm>
           <a:prstGeom prst="rect">
@@ -31477,7 +31207,7 @@
         </p:nvSpPr>
         <p:spPr>
           <a:xfrm>
-            <a:off x="4850892" y="4169664"/>
+            <a:off x="4331643" y="4169664"/>
             <a:ext cx="685800" cy="475488"/>
           </a:xfrm>
           <a:prstGeom prst="rect">
@@ -31516,7 +31246,7 @@
         </p:nvSpPr>
         <p:spPr>
           <a:xfrm>
-            <a:off x="6062472" y="4169664"/>
+            <a:off x="5370141" y="4169664"/>
             <a:ext cx="685800" cy="475488"/>
           </a:xfrm>
           <a:prstGeom prst="rect">
@@ -31543,7 +31273,7 @@
         </p:nvSpPr>
         <p:spPr>
           <a:xfrm>
-            <a:off x="6062472" y="4169664"/>
+            <a:off x="5370141" y="4169664"/>
             <a:ext cx="685800" cy="475488"/>
           </a:xfrm>
           <a:prstGeom prst="rect">
@@ -31568,7 +31298,7 @@
                 <a:ea typeface="Trebuchet MS" pitchFamily="34" charset="-122"/>
                 <a:cs typeface="Trebuchet MS" pitchFamily="34" charset="-120"/>
               </a:rPr>
-              <a:t>er</a:t>
+              <a:t>i</a:t>
             </a:r>
             <a:endParaRPr lang="en-US" sz="900" dirty="0"/>
           </a:p>
@@ -31582,7 +31312,7 @@
         </p:nvSpPr>
         <p:spPr>
           <a:xfrm>
-            <a:off x="7274052" y="4169664"/>
+            <a:off x="6408638" y="4169664"/>
             <a:ext cx="685800" cy="475488"/>
           </a:xfrm>
           <a:prstGeom prst="rect">
@@ -31609,7 +31339,73 @@
         </p:nvSpPr>
         <p:spPr>
           <a:xfrm>
-            <a:off x="7274052" y="4169664"/>
+            <a:off x="6408638" y="4169664"/>
+            <a:ext cx="685800" cy="475488"/>
+          </a:xfrm>
+          <a:prstGeom prst="rect">
+            <a:avLst/>
+          </a:prstGeom>
+          <a:noFill/>
+          <a:ln/>
+        </p:spPr>
+        <p:txBody>
+          <a:bodyPr wrap="square" lIns="0" tIns="0" rIns="0" bIns="0" rtlCol="0" anchor="ctr"/>
+          <a:lstStyle/>
+          <a:p>
+            <a:pPr algn="ctr" indent="0" marL="0">
+              <a:buNone/>
+            </a:pPr>
+            <a:r>
+              <a:rPr lang="en-US" sz="900" b="1" dirty="0">
+                <a:solidFill>
+                  <a:srgbClr val="9D174D"/>
+                </a:solidFill>
+                <a:latin typeface="Trebuchet MS" pitchFamily="34" charset="0"/>
+                <a:ea typeface="Trebuchet MS" pitchFamily="34" charset="-122"/>
+                <a:cs typeface="Trebuchet MS" pitchFamily="34" charset="-120"/>
+              </a:rPr>
+              <a:t>ng</a:t>
+            </a:r>
+            <a:endParaRPr lang="en-US" sz="900" dirty="0"/>
+          </a:p>
+        </p:txBody>
+      </p:sp>
+      <p:sp>
+        <p:nvSpPr>
+          <p:cNvPr id="46" name="Shape 44"/>
+          <p:cNvSpPr/>
+          <p:nvPr/>
+        </p:nvSpPr>
+        <p:spPr>
+          <a:xfrm>
+            <a:off x="7447135" y="4169664"/>
+            <a:ext cx="685800" cy="475488"/>
+          </a:xfrm>
+          <a:prstGeom prst="rect">
+            <a:avLst>
+              <a:gd name="adj" fmla="val 7692"/>
+            </a:avLst>
+          </a:prstGeom>
+          <a:solidFill>
+            <a:srgbClr val="FFFFFF"/>
+          </a:solidFill>
+          <a:ln w="12700">
+            <a:solidFill>
+              <a:srgbClr val="DB2777"/>
+            </a:solidFill>
+            <a:prstDash val="solid"/>
+          </a:ln>
+        </p:spPr>
+      </p:sp>
+      <p:sp>
+        <p:nvSpPr>
+          <p:cNvPr id="47" name="Text 45"/>
+          <p:cNvSpPr/>
+          <p:nvPr/>
+        </p:nvSpPr>
+        <p:spPr>
+          <a:xfrm>
+            <a:off x="7447135" y="4169664"/>
             <a:ext cx="685800" cy="475488"/>
           </a:xfrm>
           <a:prstGeom prst="rect">
@@ -31926,7 +31722,7 @@
                 <a:ea typeface="Calibri" pitchFamily="34" charset="-122"/>
                 <a:cs typeface="Calibri" pitchFamily="34" charset="-120"/>
               </a:rPr>
-              <a:t>Word Labs  •  wordlabs.app  •  Root: 'meet' = to come together, join</a:t>
+              <a:t>Word Labs  •  wordlabs.app  •  Root: 'meet' = come together, encounter</a:t>
             </a:r>
             <a:endParaRPr lang="en-US" sz="800" dirty="0"/>
           </a:p>
@@ -33095,7 +32891,7 @@
                 <a:ea typeface="Calibri" pitchFamily="34" charset="-122"/>
                 <a:cs typeface="Calibri" pitchFamily="34" charset="-120"/>
               </a:rPr>
-              <a:t>Word Labs  •  wordlabs.app  •  Root: 'meet' = to come together, join</a:t>
+              <a:t>Word Labs  •  wordlabs.app  •  Root: 'meet' = come together, encounter</a:t>
             </a:r>
             <a:endParaRPr lang="en-US" sz="800" dirty="0"/>
           </a:p>
@@ -33588,7 +33384,7 @@
                 <a:ea typeface="Trebuchet MS" pitchFamily="34" charset="-122"/>
                 <a:cs typeface="Trebuchet MS" pitchFamily="34" charset="-120"/>
               </a:rPr>
-              <a:t>fore-</a:t>
+              <a:t>pre-</a:t>
             </a:r>
             <a:endParaRPr lang="en-US" sz="1300" dirty="0"/>
           </a:p>
@@ -33741,7 +33537,7 @@
                 <a:ea typeface="Trebuchet MS" pitchFamily="34" charset="-122"/>
                 <a:cs typeface="Trebuchet MS" pitchFamily="34" charset="-120"/>
               </a:rPr>
-              <a:t>up-</a:t>
+              <a:t>un-</a:t>
             </a:r>
             <a:endParaRPr lang="en-US" sz="1300" dirty="0"/>
           </a:p>
@@ -33830,7 +33626,7 @@
                 <a:ea typeface="Trebuchet MS" pitchFamily="34" charset="-122"/>
                 <a:cs typeface="Trebuchet MS" pitchFamily="34" charset="-120"/>
               </a:rPr>
-              <a:t>-ers</a:t>
+              <a:t>-ings</a:t>
             </a:r>
             <a:endParaRPr lang="en-US" sz="1300" dirty="0"/>
           </a:p>
@@ -33983,7 +33779,7 @@
                 <a:ea typeface="Trebuchet MS" pitchFamily="34" charset="-122"/>
                 <a:cs typeface="Trebuchet MS" pitchFamily="34" charset="-120"/>
               </a:rPr>
-              <a:t>-ings</a:t>
+              <a:t>-s</a:t>
             </a:r>
             <a:endParaRPr lang="en-US" sz="1300" dirty="0"/>
           </a:p>
@@ -34047,7 +33843,7 @@
                 <a:ea typeface="Trebuchet MS" pitchFamily="34" charset="-122"/>
                 <a:cs typeface="Trebuchet MS" pitchFamily="34" charset="-120"/>
               </a:rPr>
-              <a:t>out-</a:t>
+              <a:t>over-</a:t>
             </a:r>
             <a:endParaRPr lang="en-US" sz="1300" dirty="0"/>
           </a:p>
@@ -34136,7 +33932,7 @@
                 <a:ea typeface="Trebuchet MS" pitchFamily="34" charset="-122"/>
                 <a:cs typeface="Trebuchet MS" pitchFamily="34" charset="-120"/>
               </a:rPr>
-              <a:t>-s</a:t>
+              <a:t>-ly</a:t>
             </a:r>
             <a:endParaRPr lang="en-US" sz="1300" dirty="0"/>
           </a:p>
@@ -34373,7 +34169,7 @@
                 <a:ea typeface="Trebuchet MS" pitchFamily="34" charset="-122"/>
                 <a:cs typeface="Trebuchet MS" pitchFamily="34" charset="-120"/>
               </a:rPr>
-              <a:t>greeter</a:t>
+              <a:t>meeting-place</a:t>
             </a:r>
             <a:endParaRPr lang="en-US" sz="1200" dirty="0"/>
           </a:p>
@@ -34505,7 +34301,7 @@
                 <a:ea typeface="Trebuchet MS" pitchFamily="34" charset="-122"/>
                 <a:cs typeface="Trebuchet MS" pitchFamily="34" charset="-120"/>
               </a:rPr>
-              <a:t>foremet</a:t>
+              <a:t>remeet</a:t>
             </a:r>
             <a:endParaRPr lang="en-US" sz="1200" dirty="0"/>
           </a:p>
@@ -34571,7 +34367,7 @@
                 <a:ea typeface="Trebuchet MS" pitchFamily="34" charset="-122"/>
                 <a:cs typeface="Trebuchet MS" pitchFamily="34" charset="-120"/>
               </a:rPr>
-              <a:t>meetings</a:t>
+              <a:t>premeet</a:t>
             </a:r>
             <a:endParaRPr lang="en-US" sz="1200" dirty="0"/>
           </a:p>
@@ -34637,7 +34433,7 @@
                 <a:ea typeface="Trebuchet MS" pitchFamily="34" charset="-122"/>
                 <a:cs typeface="Trebuchet MS" pitchFamily="34" charset="-120"/>
               </a:rPr>
-              <a:t>meeters</a:t>
+              <a:t>overmeet</a:t>
             </a:r>
             <a:endParaRPr lang="en-US" sz="1200" dirty="0"/>
           </a:p>
@@ -34703,7 +34499,7 @@
                 <a:ea typeface="Trebuchet MS" pitchFamily="34" charset="-122"/>
                 <a:cs typeface="Trebuchet MS" pitchFamily="34" charset="-120"/>
               </a:rPr>
-              <a:t>remeet</a:t>
+              <a:t>meetings</a:t>
             </a:r>
             <a:endParaRPr lang="en-US" sz="1200" dirty="0"/>
           </a:p>
@@ -34995,7 +34791,7 @@
                 <a:ea typeface="Calibri" pitchFamily="34" charset="-122"/>
                 <a:cs typeface="Calibri" pitchFamily="34" charset="-120"/>
               </a:rPr>
-              <a:t>Word Labs  •  wordlabs.app  •  Root: 'meet' = to come together, join</a:t>
+              <a:t>Word Labs  •  wordlabs.app  •  Root: 'meet' = come together, encounter</a:t>
             </a:r>
             <a:endParaRPr lang="en-US" sz="800" dirty="0"/>
           </a:p>
@@ -35159,7 +34955,7 @@
                 <a:ea typeface="Calibri" pitchFamily="34" charset="-122"/>
                 <a:cs typeface="Calibri" pitchFamily="34" charset="-120"/>
               </a:rPr>
-              <a:t>The core part of a word carrying its basic meaning. For example, 'meet' means 'to come together, join'.</a:t>
+              <a:t>The core part of a word carrying its basic meaning. For example, 'meet' means 'come together, encounter'.</a:t>
             </a:r>
             <a:endParaRPr lang="en-US" sz="1350" dirty="0"/>
           </a:p>
@@ -35779,7 +35575,7 @@
                 <a:ea typeface="Calibri" pitchFamily="34" charset="-122"/>
                 <a:cs typeface="Calibri" pitchFamily="34" charset="-120"/>
               </a:rPr>
-              <a:t>Word Labs  •  wordlabs.app  •  Root: 'meet' = to come together, join</a:t>
+              <a:t>Word Labs  •  wordlabs.app  •  Root: 'meet' = come together, encounter</a:t>
             </a:r>
             <a:endParaRPr lang="en-US" sz="800" dirty="0"/>
           </a:p>
@@ -35891,7 +35687,7 @@
                 <a:ea typeface="Calibri" pitchFamily="34" charset="-122"/>
                 <a:cs typeface="Calibri" pitchFamily="34" charset="-120"/>
               </a:rPr>
-              <a:t>1.  The word 'meeting' contains the root 'meet' plus the suffix '-ing'.</a:t>
+              <a:t>1.  The word 'meeting' contains the root 'meet'.</a:t>
             </a:r>
             <a:endParaRPr lang="en-US" sz="1300" dirty="0"/>
           </a:p>
@@ -36030,7 +35826,7 @@
                 <a:ea typeface="Calibri" pitchFamily="34" charset="-122"/>
                 <a:cs typeface="Calibri" pitchFamily="34" charset="-120"/>
               </a:rPr>
-              <a:t>2.  The root 'meet' comes from a French word.</a:t>
+              <a:t>2.  Adding the suffix '-ing' to 'meet' makes the word 'meeting'.</a:t>
             </a:r>
             <a:endParaRPr lang="en-US" sz="1300" dirty="0"/>
           </a:p>
@@ -36053,11 +35849,11 @@
             </a:avLst>
           </a:prstGeom>
           <a:solidFill>
-            <a:srgbClr val="FEE2E2"/>
-          </a:solidFill>
-          <a:ln w="12700">
-            <a:solidFill>
-              <a:srgbClr val="DC2626"/>
+            <a:srgbClr val="DCFCE7"/>
+          </a:solidFill>
+          <a:ln w="12700">
+            <a:solidFill>
+              <a:srgbClr val="16A34A"/>
             </a:solidFill>
             <a:prstDash val="solid"/>
           </a:ln>
@@ -36090,13 +35886,13 @@
             <a:r>
               <a:rPr lang="en-US" sz="1100" b="1" dirty="0">
                 <a:solidFill>
-                  <a:srgbClr val="DC2626"/>
+                  <a:srgbClr val="16A34A"/>
                 </a:solidFill>
                 <a:latin typeface="Trebuchet MS" pitchFamily="34" charset="0"/>
                 <a:ea typeface="Trebuchet MS" pitchFamily="34" charset="-122"/>
                 <a:cs typeface="Trebuchet MS" pitchFamily="34" charset="-120"/>
               </a:rPr>
-              <a:t>FALSE</a:t>
+              <a:t>TRUE</a:t>
             </a:r>
             <a:endParaRPr lang="en-US" sz="1100" dirty="0"/>
           </a:p>
@@ -36169,7 +35965,7 @@
                 <a:ea typeface="Calibri" pitchFamily="34" charset="-122"/>
                 <a:cs typeface="Calibri" pitchFamily="34" charset="-120"/>
               </a:rPr>
-              <a:t>3.  Adding '-ing' to 'meet' makes the word 'meeting', which means a gathering of people.</a:t>
+              <a:t>3.  The root 'meet' comes from French and means 'to speak'.</a:t>
             </a:r>
             <a:endParaRPr lang="en-US" sz="1300" dirty="0"/>
           </a:p>
@@ -36192,11 +35988,11 @@
             </a:avLst>
           </a:prstGeom>
           <a:solidFill>
-            <a:srgbClr val="DCFCE7"/>
-          </a:solidFill>
-          <a:ln w="12700">
-            <a:solidFill>
-              <a:srgbClr val="16A34A"/>
+            <a:srgbClr val="FEE2E2"/>
+          </a:solidFill>
+          <a:ln w="12700">
+            <a:solidFill>
+              <a:srgbClr val="DC2626"/>
             </a:solidFill>
             <a:prstDash val="solid"/>
           </a:ln>
@@ -36229,13 +36025,13 @@
             <a:r>
               <a:rPr lang="en-US" sz="1100" b="1" dirty="0">
                 <a:solidFill>
-                  <a:srgbClr val="16A34A"/>
+                  <a:srgbClr val="DC2626"/>
                 </a:solidFill>
                 <a:latin typeface="Trebuchet MS" pitchFamily="34" charset="0"/>
                 <a:ea typeface="Trebuchet MS" pitchFamily="34" charset="-122"/>
                 <a:cs typeface="Trebuchet MS" pitchFamily="34" charset="-120"/>
               </a:rPr>
-              <a:t>TRUE</a:t>
+              <a:t>FALSE</a:t>
             </a:r>
             <a:endParaRPr lang="en-US" sz="1100" dirty="0"/>
           </a:p>
@@ -36308,7 +36104,7 @@
                 <a:ea typeface="Calibri" pitchFamily="34" charset="-122"/>
                 <a:cs typeface="Calibri" pitchFamily="34" charset="-120"/>
               </a:rPr>
-              <a:t>4.  The prefix 're-' can be added to 'meet' to mean coming together with someone again.</a:t>
+              <a:t>4.  The prefix 're-' in 'remeet' means again.</a:t>
             </a:r>
             <a:endParaRPr lang="en-US" sz="1300" dirty="0"/>
           </a:p>
@@ -36447,7 +36243,7 @@
                 <a:ea typeface="Calibri" pitchFamily="34" charset="-122"/>
                 <a:cs typeface="Calibri" pitchFamily="34" charset="-120"/>
               </a:rPr>
-              <a:t>5.  The word 'meeting' has only one syllable.</a:t>
+              <a:t>5.  The word 'meets' has the root 'me' not 'meet'.</a:t>
             </a:r>
             <a:endParaRPr lang="en-US" sz="1300" dirty="0"/>
           </a:p>
@@ -36805,7 +36601,7 @@
                 <a:ea typeface="Calibri" pitchFamily="34" charset="-122"/>
                 <a:cs typeface="Calibri" pitchFamily="34" charset="-120"/>
               </a:rPr>
-              <a:t>Word Labs  •  wordlabs.app  •  Root: 'meet' = to come together, join</a:t>
+              <a:t>Word Labs  •  wordlabs.app  •  Root: 'meet' = come together, encounter</a:t>
             </a:r>
             <a:endParaRPr lang="en-US" sz="800" dirty="0"/>
           </a:p>
@@ -36942,7 +36738,7 @@
                 <a:ea typeface="Trebuchet MS" pitchFamily="34" charset="-122"/>
                 <a:cs typeface="Trebuchet MS" pitchFamily="34" charset="-120"/>
               </a:rPr>
-              <a:t>to come together, join</a:t>
+              <a:t>come together, encounter</a:t>
             </a:r>
             <a:endParaRPr lang="en-US" sz="2000" dirty="0"/>
           </a:p>
@@ -37218,7 +37014,7 @@
                 <a:ea typeface="Trebuchet MS" pitchFamily="34" charset="-122"/>
                 <a:cs typeface="Trebuchet MS" pitchFamily="34" charset="-120"/>
               </a:rPr>
-              <a:t>greeter</a:t>
+              <a:t>meeting-place</a:t>
             </a:r>
             <a:endParaRPr lang="en-US" sz="1300" dirty="0"/>
           </a:p>
@@ -37350,7 +37146,7 @@
                 <a:ea typeface="Trebuchet MS" pitchFamily="34" charset="-122"/>
                 <a:cs typeface="Trebuchet MS" pitchFamily="34" charset="-120"/>
               </a:rPr>
-              <a:t>foremet</a:t>
+              <a:t>remeet</a:t>
             </a:r>
             <a:endParaRPr lang="en-US" sz="1300" dirty="0"/>
           </a:p>
@@ -37416,7 +37212,7 @@
                 <a:ea typeface="Trebuchet MS" pitchFamily="34" charset="-122"/>
                 <a:cs typeface="Trebuchet MS" pitchFamily="34" charset="-120"/>
               </a:rPr>
-              <a:t>meetings</a:t>
+              <a:t>premeet</a:t>
             </a:r>
             <a:endParaRPr lang="en-US" sz="1300" dirty="0"/>
           </a:p>
@@ -37482,7 +37278,7 @@
                 <a:ea typeface="Trebuchet MS" pitchFamily="34" charset="-122"/>
                 <a:cs typeface="Trebuchet MS" pitchFamily="34" charset="-120"/>
               </a:rPr>
-              <a:t>meeters</a:t>
+              <a:t>overmeet</a:t>
             </a:r>
             <a:endParaRPr lang="en-US" sz="1300" dirty="0"/>
           </a:p>
@@ -37774,7 +37570,7 @@
                 <a:ea typeface="Calibri" pitchFamily="34" charset="-122"/>
                 <a:cs typeface="Calibri" pitchFamily="34" charset="-120"/>
               </a:rPr>
-              <a:t>Word Labs  •  wordlabs.app  •  Root: 'meet' = to come together, join</a:t>
+              <a:t>Word Labs  •  wordlabs.app  •  Root: 'meet' = come together, encounter</a:t>
             </a:r>
             <a:endParaRPr lang="en-US" sz="800" dirty="0"/>
           </a:p>
@@ -38267,7 +38063,7 @@
                 <a:ea typeface="Trebuchet MS" pitchFamily="34" charset="-122"/>
                 <a:cs typeface="Trebuchet MS" pitchFamily="34" charset="-120"/>
               </a:rPr>
-              <a:t>fore-</a:t>
+              <a:t>pre-</a:t>
             </a:r>
             <a:endParaRPr lang="en-US" sz="1300" dirty="0"/>
           </a:p>
@@ -38420,7 +38216,7 @@
                 <a:ea typeface="Trebuchet MS" pitchFamily="34" charset="-122"/>
                 <a:cs typeface="Trebuchet MS" pitchFamily="34" charset="-120"/>
               </a:rPr>
-              <a:t>up-</a:t>
+              <a:t>un-</a:t>
             </a:r>
             <a:endParaRPr lang="en-US" sz="1300" dirty="0"/>
           </a:p>
@@ -38509,7 +38305,7 @@
                 <a:ea typeface="Trebuchet MS" pitchFamily="34" charset="-122"/>
                 <a:cs typeface="Trebuchet MS" pitchFamily="34" charset="-120"/>
               </a:rPr>
-              <a:t>-ers</a:t>
+              <a:t>-ings</a:t>
             </a:r>
             <a:endParaRPr lang="en-US" sz="1300" dirty="0"/>
           </a:p>
@@ -38662,7 +38458,7 @@
                 <a:ea typeface="Trebuchet MS" pitchFamily="34" charset="-122"/>
                 <a:cs typeface="Trebuchet MS" pitchFamily="34" charset="-120"/>
               </a:rPr>
-              <a:t>-ings</a:t>
+              <a:t>-s</a:t>
             </a:r>
             <a:endParaRPr lang="en-US" sz="1300" dirty="0"/>
           </a:p>
@@ -38726,7 +38522,7 @@
                 <a:ea typeface="Trebuchet MS" pitchFamily="34" charset="-122"/>
                 <a:cs typeface="Trebuchet MS" pitchFamily="34" charset="-120"/>
               </a:rPr>
-              <a:t>out-</a:t>
+              <a:t>over-</a:t>
             </a:r>
             <a:endParaRPr lang="en-US" sz="1300" dirty="0"/>
           </a:p>
@@ -38815,7 +38611,7 @@
                 <a:ea typeface="Trebuchet MS" pitchFamily="34" charset="-122"/>
                 <a:cs typeface="Trebuchet MS" pitchFamily="34" charset="-120"/>
               </a:rPr>
-              <a:t>-s</a:t>
+              <a:t>-ly</a:t>
             </a:r>
             <a:endParaRPr lang="en-US" sz="1300" dirty="0"/>
           </a:p>
@@ -39548,7 +39344,7 @@
                 <a:ea typeface="Calibri" pitchFamily="34" charset="-122"/>
                 <a:cs typeface="Calibri" pitchFamily="34" charset="-120"/>
               </a:rPr>
-              <a:t>Word Labs  •  wordlabs.app  •  Root: 'meet' = to come together, join</a:t>
+              <a:t>Word Labs  •  wordlabs.app  •  Root: 'meet' = come together, encounter</a:t>
             </a:r>
             <a:endParaRPr lang="en-US" sz="800" dirty="0"/>
           </a:p>
@@ -39726,7 +39522,7 @@
                 <a:ea typeface="Calibri" pitchFamily="34" charset="-122"/>
                 <a:cs typeface="Calibri" pitchFamily="34" charset="-120"/>
               </a:rPr>
-              <a:t>People who meet or come together with others.</a:t>
+              <a:t>To have too many meetings or gather together too often.</a:t>
             </a:r>
             <a:endParaRPr lang="en-US" sz="1200" dirty="0"/>
           </a:p>
@@ -39865,7 +39661,7 @@
                 <a:ea typeface="Calibri" pitchFamily="34" charset="-122"/>
                 <a:cs typeface="Calibri" pitchFamily="34" charset="-120"/>
               </a:rPr>
-              <a:t>An informal gathering where a group of people come together to share an interest.</a:t>
+              <a:t>An informal gathering where people get together, often planned online.</a:t>
             </a:r>
             <a:endParaRPr lang="en-US" sz="1200" dirty="0"/>
           </a:p>
@@ -39938,7 +39734,7 @@
                 <a:ea typeface="Trebuchet MS" pitchFamily="34" charset="-122"/>
                 <a:cs typeface="Trebuchet MS" pitchFamily="34" charset="-120"/>
               </a:rPr>
-              <a:t>greeter</a:t>
+              <a:t>meeting-place</a:t>
             </a:r>
             <a:endParaRPr lang="en-US" sz="1200" dirty="0"/>
           </a:p>
@@ -40004,7 +39800,7 @@
                 <a:ea typeface="Calibri" pitchFamily="34" charset="-122"/>
                 <a:cs typeface="Calibri" pitchFamily="34" charset="-120"/>
               </a:rPr>
-              <a:t>Having been met or encountered before a particular time or event.</a:t>
+              <a:t>To meet someone again after not seeing them for a while.</a:t>
             </a:r>
             <a:endParaRPr lang="en-US" sz="1200" dirty="0"/>
           </a:p>
@@ -40143,7 +39939,7 @@
                 <a:ea typeface="Calibri" pitchFamily="34" charset="-122"/>
                 <a:cs typeface="Calibri" pitchFamily="34" charset="-120"/>
               </a:rPr>
-              <a:t>A person whose job is to welcome and say hello to people as they arrive.</a:t>
+              <a:t>A spot where people agree to come together.</a:t>
             </a:r>
             <a:endParaRPr lang="en-US" sz="1200" dirty="0"/>
           </a:p>
@@ -40216,7 +40012,7 @@
                 <a:ea typeface="Trebuchet MS" pitchFamily="34" charset="-122"/>
                 <a:cs typeface="Trebuchet MS" pitchFamily="34" charset="-120"/>
               </a:rPr>
-              <a:t>foremet</a:t>
+              <a:t>remeet</a:t>
             </a:r>
             <a:endParaRPr lang="en-US" sz="1200" dirty="0"/>
           </a:p>
@@ -40282,7 +40078,7 @@
                 <a:ea typeface="Calibri" pitchFamily="34" charset="-122"/>
                 <a:cs typeface="Calibri" pitchFamily="34" charset="-120"/>
               </a:rPr>
-              <a:t>More than one gathering or assembly of people coming together.</a:t>
+              <a:t>A short gathering that happens before the main meeting.</a:t>
             </a:r>
             <a:endParaRPr lang="en-US" sz="1200" dirty="0"/>
           </a:p>
@@ -40355,7 +40151,7 @@
                 <a:ea typeface="Trebuchet MS" pitchFamily="34" charset="-122"/>
                 <a:cs typeface="Trebuchet MS" pitchFamily="34" charset="-120"/>
               </a:rPr>
-              <a:t>meetings</a:t>
+              <a:t>premeet</a:t>
             </a:r>
             <a:endParaRPr lang="en-US" sz="1200" dirty="0"/>
           </a:p>
@@ -40421,7 +40217,7 @@
                 <a:ea typeface="Calibri" pitchFamily="34" charset="-122"/>
                 <a:cs typeface="Calibri" pitchFamily="34" charset="-120"/>
               </a:rPr>
-              <a:t>A gathering where people come together to talk or plan something.</a:t>
+              <a:t>A gathering where people come together to talk about something.</a:t>
             </a:r>
             <a:endParaRPr lang="en-US" sz="1200" dirty="0"/>
           </a:p>
@@ -40494,7 +40290,7 @@
                 <a:ea typeface="Trebuchet MS" pitchFamily="34" charset="-122"/>
                 <a:cs typeface="Trebuchet MS" pitchFamily="34" charset="-120"/>
               </a:rPr>
-              <a:t>meeters</a:t>
+              <a:t>overmeet</a:t>
             </a:r>
             <a:endParaRPr lang="en-US" sz="1200" dirty="0"/>
           </a:p>
@@ -40560,7 +40356,7 @@
                 <a:ea typeface="Calibri" pitchFamily="34" charset="-122"/>
                 <a:cs typeface="Calibri" pitchFamily="34" charset="-120"/>
               </a:rPr>
-              <a:t>When someone comes together with another person or group.</a:t>
+              <a:t>When someone or something comes together with another person or thing.</a:t>
             </a:r>
             <a:endParaRPr lang="en-US" sz="1200" dirty="0"/>
           </a:p>
@@ -40852,7 +40648,7 @@
                 <a:ea typeface="Calibri" pitchFamily="34" charset="-122"/>
                 <a:cs typeface="Calibri" pitchFamily="34" charset="-120"/>
               </a:rPr>
-              <a:t>Word Labs  •  wordlabs.app  •  Root: 'meet' = to come together, join</a:t>
+              <a:t>Word Labs  •  wordlabs.app  •  Root: 'meet' = come together, encounter</a:t>
             </a:r>
             <a:endParaRPr lang="en-US" sz="800" dirty="0"/>
           </a:p>
@@ -41055,7 +40851,7 @@
                 <a:ea typeface="Calibri" pitchFamily="34" charset="-122"/>
                 <a:cs typeface="Calibri" pitchFamily="34" charset="-120"/>
               </a:rPr>
-              <a:t>The student council held a meeting after school to plan the end-of-year celebration.</a:t>
+              <a:t>The school council will hold a meeting on Friday to discuss the new playground equipment.</a:t>
             </a:r>
             <a:endParaRPr lang="en-US" sz="1500" dirty="0"/>
           </a:p>
@@ -41219,7 +41015,7 @@
                 <a:ea typeface="Calibri" pitchFamily="34" charset="-122"/>
                 <a:cs typeface="Calibri" pitchFamily="34" charset="-120"/>
               </a:rPr>
-              <a:t>Our class remeet every Monday morning to share our weekend news with each other.</a:t>
+              <a:t>She was nervous about meeting her new teacher at the start of the year.</a:t>
             </a:r>
             <a:endParaRPr lang="en-US" sz="1500" dirty="0"/>
           </a:p>
@@ -41383,7 +41179,7 @@
                 <a:ea typeface="Calibri" pitchFamily="34" charset="-122"/>
                 <a:cs typeface="Calibri" pitchFamily="34" charset="-120"/>
               </a:rPr>
-              <a:t>The friendly greeter at the school entrance welcomed every student with a big smile.</a:t>
+              <a:t>The team meets every Tuesday afternoon to practise for the upcoming competition.</a:t>
             </a:r>
             <a:endParaRPr lang="en-US" sz="1500" dirty="0"/>
           </a:p>
